--- a/chapter_05/figures/observationa_gridded_dataset.pptx
+++ b/chapter_05/figures/observationa_gridded_dataset.pptx
@@ -125,12 +125,12 @@
   <pc:docChgLst>
     <pc:chgData name="Fatima Pillosu" userId="a6295d4dc9e22643" providerId="LiveId" clId="{87453732-75AC-4426-B5D3-B7C69C2D4F54}"/>
     <pc:docChg chg="undo custSel modSld">
-      <pc:chgData name="Fatima Pillosu" userId="a6295d4dc9e22643" providerId="LiveId" clId="{87453732-75AC-4426-B5D3-B7C69C2D4F54}" dt="2026-01-22T18:03:25.533" v="855" actId="1036"/>
+      <pc:chgData name="Fatima Pillosu" userId="a6295d4dc9e22643" providerId="LiveId" clId="{87453732-75AC-4426-B5D3-B7C69C2D4F54}" dt="2026-01-22T18:21:16.344" v="867" actId="1582"/>
       <pc:docMkLst>
         <pc:docMk/>
       </pc:docMkLst>
       <pc:sldChg chg="addSp delSp modSp mod">
-        <pc:chgData name="Fatima Pillosu" userId="a6295d4dc9e22643" providerId="LiveId" clId="{87453732-75AC-4426-B5D3-B7C69C2D4F54}" dt="2026-01-22T18:03:25.533" v="855" actId="1036"/>
+        <pc:chgData name="Fatima Pillosu" userId="a6295d4dc9e22643" providerId="LiveId" clId="{87453732-75AC-4426-B5D3-B7C69C2D4F54}" dt="2026-01-22T18:21:16.344" v="867" actId="1582"/>
         <pc:sldMkLst>
           <pc:docMk/>
           <pc:sldMk cId="4155273118" sldId="256"/>
@@ -503,6 +503,14 @@
             <ac:grpSpMk id="82" creationId="{872DB2F7-6FAA-CB54-86FF-3765AD701207}"/>
           </ac:grpSpMkLst>
         </pc:grpChg>
+        <pc:picChg chg="add mod">
+          <ac:chgData name="Fatima Pillosu" userId="a6295d4dc9e22643" providerId="LiveId" clId="{87453732-75AC-4426-B5D3-B7C69C2D4F54}" dt="2026-01-22T18:21:16.344" v="867" actId="1582"/>
+          <ac:picMkLst>
+            <pc:docMk/>
+            <pc:sldMk cId="4155273118" sldId="256"/>
+            <ac:picMk id="3" creationId="{2EB6414C-6FBA-B99F-4B11-3F4E2CEE6F13}"/>
+          </ac:picMkLst>
+        </pc:picChg>
         <pc:picChg chg="mod">
           <ac:chgData name="Fatima Pillosu" userId="a6295d4dc9e22643" providerId="LiveId" clId="{87453732-75AC-4426-B5D3-B7C69C2D4F54}" dt="2026-01-22T17:32:51.608" v="538" actId="164"/>
           <ac:picMkLst>
@@ -573,6 +581,14 @@
             <pc:docMk/>
             <pc:sldMk cId="4155273118" sldId="256"/>
             <ac:picMk id="44" creationId="{7C4F1250-5AF8-C7F6-9A78-271C75A6DE07}"/>
+          </ac:picMkLst>
+        </pc:picChg>
+        <pc:picChg chg="del">
+          <ac:chgData name="Fatima Pillosu" userId="a6295d4dc9e22643" providerId="LiveId" clId="{87453732-75AC-4426-B5D3-B7C69C2D4F54}" dt="2026-01-22T18:17:49.610" v="856" actId="478"/>
+          <ac:picMkLst>
+            <pc:docMk/>
+            <pc:sldMk cId="4155273118" sldId="256"/>
+            <ac:picMk id="61" creationId="{F335CD81-03A7-E1AB-27C8-22963CF87DD5}"/>
           </ac:picMkLst>
         </pc:picChg>
         <pc:cxnChg chg="add mod">
@@ -3722,37 +3738,6 @@
         </p:sp>
         <p:pic>
           <p:nvPicPr>
-            <p:cNvPr id="61" name="Picture 60">
-              <a:extLst>
-                <a:ext uri="{FF2B5EF4-FFF2-40B4-BE49-F238E27FC236}">
-                  <a16:creationId xmlns:a16="http://schemas.microsoft.com/office/drawing/2014/main" id="{F335CD81-03A7-E1AB-27C8-22963CF87DD5}"/>
-                </a:ext>
-              </a:extLst>
-            </p:cNvPr>
-            <p:cNvPicPr>
-              <a:picLocks noChangeAspect="1"/>
-            </p:cNvPicPr>
-            <p:nvPr/>
-          </p:nvPicPr>
-          <p:blipFill>
-            <a:blip r:embed="rId2"/>
-            <a:srcRect l="2852" t="4237" r="1628" b="2294"/>
-            <a:stretch>
-              <a:fillRect/>
-            </a:stretch>
-          </p:blipFill>
-          <p:spPr>
-            <a:xfrm>
-              <a:off x="77606" y="1401869"/>
-              <a:ext cx="880800" cy="690931"/>
-            </a:xfrm>
-            <a:prstGeom prst="rect">
-              <a:avLst/>
-            </a:prstGeom>
-          </p:spPr>
-        </p:pic>
-        <p:pic>
-          <p:nvPicPr>
             <p:cNvPr id="62" name="Picture 61">
               <a:extLst>
                 <a:ext uri="{FF2B5EF4-FFF2-40B4-BE49-F238E27FC236}">
@@ -3766,7 +3751,7 @@
             <p:nvPr/>
           </p:nvPicPr>
           <p:blipFill>
-            <a:blip r:embed="rId3"/>
+            <a:blip r:embed="rId2"/>
             <a:srcRect l="13351"/>
             <a:stretch>
               <a:fillRect/>
@@ -4297,7 +4282,7 @@
                 <p:nvPr/>
               </p:nvPicPr>
               <p:blipFill>
-                <a:blip r:embed="rId4"/>
+                <a:blip r:embed="rId3"/>
                 <a:stretch>
                   <a:fillRect/>
                 </a:stretch>
@@ -4536,7 +4521,7 @@
               <p:nvPr/>
             </p:nvPicPr>
             <p:blipFill>
-              <a:blip r:embed="rId5"/>
+              <a:blip r:embed="rId4"/>
               <a:srcRect l="2708" t="1599" r="14583"/>
               <a:stretch>
                 <a:fillRect/>
@@ -4664,7 +4649,7 @@
               <p:nvPr/>
             </p:nvPicPr>
             <p:blipFill>
-              <a:blip r:embed="rId6"/>
+              <a:blip r:embed="rId5"/>
               <a:stretch>
                 <a:fillRect/>
               </a:stretch>
@@ -4905,6 +4890,44 @@
           </a:fontRef>
         </p:style>
       </p:cxnSp>
+      <p:pic>
+        <p:nvPicPr>
+          <p:cNvPr id="3" name="Picture 2">
+            <a:extLst>
+              <a:ext uri="{FF2B5EF4-FFF2-40B4-BE49-F238E27FC236}">
+                <a16:creationId xmlns:a16="http://schemas.microsoft.com/office/drawing/2014/main" id="{2EB6414C-6FBA-B99F-4B11-3F4E2CEE6F13}"/>
+              </a:ext>
+            </a:extLst>
+          </p:cNvPr>
+          <p:cNvPicPr>
+            <a:picLocks noChangeAspect="1"/>
+          </p:cNvPicPr>
+          <p:nvPr/>
+        </p:nvPicPr>
+        <p:blipFill>
+          <a:blip r:embed="rId6"/>
+          <a:stretch>
+            <a:fillRect/>
+          </a:stretch>
+        </p:blipFill>
+        <p:spPr>
+          <a:xfrm>
+            <a:off x="115378" y="2072235"/>
+            <a:ext cx="817549" cy="639543"/>
+          </a:xfrm>
+          <a:prstGeom prst="rect">
+            <a:avLst/>
+          </a:prstGeom>
+          <a:ln w="9525">
+            <a:solidFill>
+              <a:schemeClr val="tx1">
+                <a:lumMod val="50000"/>
+                <a:lumOff val="50000"/>
+              </a:schemeClr>
+            </a:solidFill>
+          </a:ln>
+        </p:spPr>
+      </p:pic>
     </p:spTree>
     <p:extLst>
       <p:ext uri="{BB962C8B-B14F-4D97-AF65-F5344CB8AC3E}">

--- a/chapter_05/figures/observationa_gridded_dataset.pptx
+++ b/chapter_05/figures/observationa_gridded_dataset.pptx
@@ -115,7 +115,7 @@
 <file path=ppt/revisionInfo.xml><?xml version="1.0" encoding="utf-8"?>
 <p1510:revInfo xmlns:a="http://schemas.openxmlformats.org/drawingml/2006/main" xmlns:r="http://schemas.openxmlformats.org/officeDocument/2006/relationships" xmlns:p1510="http://schemas.microsoft.com/office/powerpoint/2015/10/main">
   <p1510:revLst>
-    <p1510:client id="{4448D9D5-600E-4759-BC05-5B38C92E3F5B}" v="34" dt="2026-01-22T18:03:16.719"/>
+    <p1510:client id="{4448D9D5-600E-4759-BC05-5B38C92E3F5B}" v="45" dt="2026-01-22T22:04:02.330"/>
   </p1510:revLst>
 </p1510:revInfo>
 </file>
@@ -125,12 +125,12 @@
   <pc:docChgLst>
     <pc:chgData name="Fatima Pillosu" userId="a6295d4dc9e22643" providerId="LiveId" clId="{87453732-75AC-4426-B5D3-B7C69C2D4F54}"/>
     <pc:docChg chg="undo custSel modSld">
-      <pc:chgData name="Fatima Pillosu" userId="a6295d4dc9e22643" providerId="LiveId" clId="{87453732-75AC-4426-B5D3-B7C69C2D4F54}" dt="2026-01-22T18:21:16.344" v="867" actId="1582"/>
+      <pc:chgData name="Fatima Pillosu" userId="a6295d4dc9e22643" providerId="LiveId" clId="{87453732-75AC-4426-B5D3-B7C69C2D4F54}" dt="2026-01-22T22:04:02.330" v="1043" actId="164"/>
       <pc:docMkLst>
         <pc:docMk/>
       </pc:docMkLst>
       <pc:sldChg chg="addSp delSp modSp mod">
-        <pc:chgData name="Fatima Pillosu" userId="a6295d4dc9e22643" providerId="LiveId" clId="{87453732-75AC-4426-B5D3-B7C69C2D4F54}" dt="2026-01-22T18:21:16.344" v="867" actId="1582"/>
+        <pc:chgData name="Fatima Pillosu" userId="a6295d4dc9e22643" providerId="LiveId" clId="{87453732-75AC-4426-B5D3-B7C69C2D4F54}" dt="2026-01-22T22:04:02.330" v="1043" actId="164"/>
         <pc:sldMkLst>
           <pc:docMk/>
           <pc:sldMk cId="4155273118" sldId="256"/>
@@ -143,6 +143,14 @@
             <ac:spMk id="4" creationId="{3CCAD409-6CE6-14B6-591D-924DE4834C1E}"/>
           </ac:spMkLst>
         </pc:spChg>
+        <pc:spChg chg="add del">
+          <ac:chgData name="Fatima Pillosu" userId="a6295d4dc9e22643" providerId="LiveId" clId="{87453732-75AC-4426-B5D3-B7C69C2D4F54}" dt="2026-01-22T21:56:43.911" v="889" actId="22"/>
+          <ac:spMkLst>
+            <pc:docMk/>
+            <pc:sldMk cId="4155273118" sldId="256"/>
+            <ac:spMk id="4" creationId="{EFF87F11-77A5-B96A-4C6A-701B9CA5A106}"/>
+          </ac:spMkLst>
+        </pc:spChg>
         <pc:spChg chg="mod">
           <ac:chgData name="Fatima Pillosu" userId="a6295d4dc9e22643" providerId="LiveId" clId="{87453732-75AC-4426-B5D3-B7C69C2D4F54}" dt="2026-01-22T17:32:51.608" v="538" actId="164"/>
           <ac:spMkLst>
@@ -159,12 +167,44 @@
             <ac:spMk id="8" creationId="{753E959C-8472-9A74-C109-3EE07465250B}"/>
           </ac:spMkLst>
         </pc:spChg>
+        <pc:spChg chg="add mod">
+          <ac:chgData name="Fatima Pillosu" userId="a6295d4dc9e22643" providerId="LiveId" clId="{87453732-75AC-4426-B5D3-B7C69C2D4F54}" dt="2026-01-22T22:04:02.330" v="1043" actId="164"/>
+          <ac:spMkLst>
+            <pc:docMk/>
+            <pc:sldMk cId="4155273118" sldId="256"/>
+            <ac:spMk id="9" creationId="{288CBE8A-D728-A863-6E7E-B69BDCEC8C94}"/>
+          </ac:spMkLst>
+        </pc:spChg>
         <pc:spChg chg="add del mod">
           <ac:chgData name="Fatima Pillosu" userId="a6295d4dc9e22643" providerId="LiveId" clId="{87453732-75AC-4426-B5D3-B7C69C2D4F54}" dt="2026-01-22T17:31:55.251" v="534" actId="478"/>
           <ac:spMkLst>
             <pc:docMk/>
             <pc:sldMk cId="4155273118" sldId="256"/>
             <ac:spMk id="9" creationId="{BDC9FCB4-E10E-2DC7-5685-3578E65076FD}"/>
+          </ac:spMkLst>
+        </pc:spChg>
+        <pc:spChg chg="add mod">
+          <ac:chgData name="Fatima Pillosu" userId="a6295d4dc9e22643" providerId="LiveId" clId="{87453732-75AC-4426-B5D3-B7C69C2D4F54}" dt="2026-01-22T22:04:02.330" v="1043" actId="164"/>
+          <ac:spMkLst>
+            <pc:docMk/>
+            <pc:sldMk cId="4155273118" sldId="256"/>
+            <ac:spMk id="10" creationId="{AC68D853-B4DB-1139-485A-2696D64CD685}"/>
+          </ac:spMkLst>
+        </pc:spChg>
+        <pc:spChg chg="add mod">
+          <ac:chgData name="Fatima Pillosu" userId="a6295d4dc9e22643" providerId="LiveId" clId="{87453732-75AC-4426-B5D3-B7C69C2D4F54}" dt="2026-01-22T22:04:02.330" v="1043" actId="164"/>
+          <ac:spMkLst>
+            <pc:docMk/>
+            <pc:sldMk cId="4155273118" sldId="256"/>
+            <ac:spMk id="11" creationId="{A6E281B1-96B6-9580-6F86-551F986094BC}"/>
+          </ac:spMkLst>
+        </pc:spChg>
+        <pc:spChg chg="add mod">
+          <ac:chgData name="Fatima Pillosu" userId="a6295d4dc9e22643" providerId="LiveId" clId="{87453732-75AC-4426-B5D3-B7C69C2D4F54}" dt="2026-01-22T22:04:02.330" v="1043" actId="164"/>
+          <ac:spMkLst>
+            <pc:docMk/>
+            <pc:sldMk cId="4155273118" sldId="256"/>
+            <ac:spMk id="12" creationId="{180766EE-FB1E-3E60-CC59-657F79EDDB42}"/>
           </ac:spMkLst>
         </pc:spChg>
         <pc:spChg chg="mod">
@@ -367,54 +407,94 @@
             <ac:spMk id="64" creationId="{FBCEE915-9377-42DB-3A45-4538306A8F72}"/>
           </ac:spMkLst>
         </pc:spChg>
-        <pc:spChg chg="mod">
-          <ac:chgData name="Fatima Pillosu" userId="a6295d4dc9e22643" providerId="LiveId" clId="{87453732-75AC-4426-B5D3-B7C69C2D4F54}" dt="2026-01-22T18:03:16.719" v="852"/>
+        <pc:spChg chg="mod topLvl">
+          <ac:chgData name="Fatima Pillosu" userId="a6295d4dc9e22643" providerId="LiveId" clId="{87453732-75AC-4426-B5D3-B7C69C2D4F54}" dt="2026-01-22T21:52:54.040" v="884" actId="165"/>
+          <ac:spMkLst>
+            <pc:docMk/>
+            <pc:sldMk cId="4155273118" sldId="256"/>
+            <ac:spMk id="68" creationId="{A7B0EF48-DED5-5148-BBEE-84B972A0A0F8}"/>
+          </ac:spMkLst>
+        </pc:spChg>
+        <pc:spChg chg="mod topLvl">
+          <ac:chgData name="Fatima Pillosu" userId="a6295d4dc9e22643" providerId="LiveId" clId="{87453732-75AC-4426-B5D3-B7C69C2D4F54}" dt="2026-01-22T21:52:58.161" v="885" actId="165"/>
           <ac:spMkLst>
             <pc:docMk/>
             <pc:sldMk cId="4155273118" sldId="256"/>
             <ac:spMk id="69" creationId="{D5CD603C-4F13-FE2C-33B4-BDD84D975942}"/>
           </ac:spMkLst>
         </pc:spChg>
-        <pc:spChg chg="mod">
-          <ac:chgData name="Fatima Pillosu" userId="a6295d4dc9e22643" providerId="LiveId" clId="{87453732-75AC-4426-B5D3-B7C69C2D4F54}" dt="2026-01-22T18:03:16.719" v="852"/>
+        <pc:spChg chg="mod topLvl">
+          <ac:chgData name="Fatima Pillosu" userId="a6295d4dc9e22643" providerId="LiveId" clId="{87453732-75AC-4426-B5D3-B7C69C2D4F54}" dt="2026-01-22T21:52:58.161" v="885" actId="165"/>
           <ac:spMkLst>
             <pc:docMk/>
             <pc:sldMk cId="4155273118" sldId="256"/>
             <ac:spMk id="70" creationId="{CEFCF6D4-2C62-A7BB-A782-554728E33CCF}"/>
           </ac:spMkLst>
         </pc:spChg>
-        <pc:spChg chg="mod">
-          <ac:chgData name="Fatima Pillosu" userId="a6295d4dc9e22643" providerId="LiveId" clId="{87453732-75AC-4426-B5D3-B7C69C2D4F54}" dt="2026-01-22T18:03:16.719" v="852"/>
+        <pc:spChg chg="mod topLvl">
+          <ac:chgData name="Fatima Pillosu" userId="a6295d4dc9e22643" providerId="LiveId" clId="{87453732-75AC-4426-B5D3-B7C69C2D4F54}" dt="2026-01-22T21:52:58.161" v="885" actId="165"/>
+          <ac:spMkLst>
+            <pc:docMk/>
+            <pc:sldMk cId="4155273118" sldId="256"/>
+            <ac:spMk id="71" creationId="{4B8F791A-03AF-6A2B-D08A-2FDC7562E899}"/>
+          </ac:spMkLst>
+        </pc:spChg>
+        <pc:spChg chg="mod topLvl">
+          <ac:chgData name="Fatima Pillosu" userId="a6295d4dc9e22643" providerId="LiveId" clId="{87453732-75AC-4426-B5D3-B7C69C2D4F54}" dt="2026-01-22T21:52:58.161" v="885" actId="165"/>
           <ac:spMkLst>
             <pc:docMk/>
             <pc:sldMk cId="4155273118" sldId="256"/>
             <ac:spMk id="74" creationId="{2B01569A-59C1-0E07-4C8F-764E4ED22059}"/>
           </ac:spMkLst>
         </pc:spChg>
-        <pc:spChg chg="mod">
-          <ac:chgData name="Fatima Pillosu" userId="a6295d4dc9e22643" providerId="LiveId" clId="{87453732-75AC-4426-B5D3-B7C69C2D4F54}" dt="2026-01-22T18:03:16.719" v="852"/>
+        <pc:spChg chg="mod topLvl">
+          <ac:chgData name="Fatima Pillosu" userId="a6295d4dc9e22643" providerId="LiveId" clId="{87453732-75AC-4426-B5D3-B7C69C2D4F54}" dt="2026-01-22T21:53:01.803" v="886" actId="165"/>
+          <ac:spMkLst>
+            <pc:docMk/>
+            <pc:sldMk cId="4155273118" sldId="256"/>
+            <ac:spMk id="80" creationId="{D9D865EB-1F18-14FE-26C7-19BAF52B20E4}"/>
+          </ac:spMkLst>
+        </pc:spChg>
+        <pc:spChg chg="mod topLvl">
+          <ac:chgData name="Fatima Pillosu" userId="a6295d4dc9e22643" providerId="LiveId" clId="{87453732-75AC-4426-B5D3-B7C69C2D4F54}" dt="2026-01-22T21:53:01.803" v="886" actId="165"/>
           <ac:spMkLst>
             <pc:docMk/>
             <pc:sldMk cId="4155273118" sldId="256"/>
             <ac:spMk id="81" creationId="{B7816E59-8B07-4D98-C917-C42CC54168D5}"/>
           </ac:spMkLst>
         </pc:spChg>
-        <pc:spChg chg="mod">
-          <ac:chgData name="Fatima Pillosu" userId="a6295d4dc9e22643" providerId="LiveId" clId="{87453732-75AC-4426-B5D3-B7C69C2D4F54}" dt="2026-01-22T18:03:16.719" v="852"/>
+        <pc:spChg chg="mod topLvl">
+          <ac:chgData name="Fatima Pillosu" userId="a6295d4dc9e22643" providerId="LiveId" clId="{87453732-75AC-4426-B5D3-B7C69C2D4F54}" dt="2026-01-22T22:04:02.330" v="1043" actId="164"/>
           <ac:spMkLst>
             <pc:docMk/>
             <pc:sldMk cId="4155273118" sldId="256"/>
             <ac:spMk id="84" creationId="{2317A568-3F89-13AE-99AB-5423B34939E8}"/>
           </ac:spMkLst>
         </pc:spChg>
-        <pc:spChg chg="mod">
-          <ac:chgData name="Fatima Pillosu" userId="a6295d4dc9e22643" providerId="LiveId" clId="{87453732-75AC-4426-B5D3-B7C69C2D4F54}" dt="2026-01-22T18:03:16.719" v="852"/>
+        <pc:spChg chg="mod topLvl">
+          <ac:chgData name="Fatima Pillosu" userId="a6295d4dc9e22643" providerId="LiveId" clId="{87453732-75AC-4426-B5D3-B7C69C2D4F54}" dt="2026-01-22T22:04:02.330" v="1043" actId="164"/>
+          <ac:spMkLst>
+            <pc:docMk/>
+            <pc:sldMk cId="4155273118" sldId="256"/>
+            <ac:spMk id="86" creationId="{83B97A3E-BF25-2C9C-A028-9CBE8D5603ED}"/>
+          </ac:spMkLst>
+        </pc:spChg>
+        <pc:spChg chg="mod topLvl">
+          <ac:chgData name="Fatima Pillosu" userId="a6295d4dc9e22643" providerId="LiveId" clId="{87453732-75AC-4426-B5D3-B7C69C2D4F54}" dt="2026-01-22T22:04:02.330" v="1043" actId="164"/>
           <ac:spMkLst>
             <pc:docMk/>
             <pc:sldMk cId="4155273118" sldId="256"/>
             <ac:spMk id="87" creationId="{495484E7-DE8A-893A-111A-9BAC0431DE2B}"/>
           </ac:spMkLst>
         </pc:spChg>
+        <pc:grpChg chg="add mod">
+          <ac:chgData name="Fatima Pillosu" userId="a6295d4dc9e22643" providerId="LiveId" clId="{87453732-75AC-4426-B5D3-B7C69C2D4F54}" dt="2026-01-22T22:04:02.330" v="1043" actId="164"/>
+          <ac:grpSpMkLst>
+            <pc:docMk/>
+            <pc:sldMk cId="4155273118" sldId="256"/>
+            <ac:grpSpMk id="13" creationId="{D4B79B93-0C6E-8157-D9C9-1EBD91EBA715}"/>
+          </ac:grpSpMkLst>
+        </pc:grpChg>
         <pc:grpChg chg="add del mod">
           <ac:chgData name="Fatima Pillosu" userId="a6295d4dc9e22643" providerId="LiveId" clId="{87453732-75AC-4426-B5D3-B7C69C2D4F54}" dt="2026-01-22T17:58:56.377" v="794" actId="478"/>
           <ac:grpSpMkLst>
@@ -495,12 +575,36 @@
             <ac:grpSpMk id="66" creationId="{5E27E50A-D03C-22F6-0885-3C85A9CB3077}"/>
           </ac:grpSpMkLst>
         </pc:grpChg>
-        <pc:grpChg chg="mod">
-          <ac:chgData name="Fatima Pillosu" userId="a6295d4dc9e22643" providerId="LiveId" clId="{87453732-75AC-4426-B5D3-B7C69C2D4F54}" dt="2026-01-22T18:03:25.533" v="855" actId="1036"/>
+        <pc:grpChg chg="del mod topLvl">
+          <ac:chgData name="Fatima Pillosu" userId="a6295d4dc9e22643" providerId="LiveId" clId="{87453732-75AC-4426-B5D3-B7C69C2D4F54}" dt="2026-01-22T21:52:58.161" v="885" actId="165"/>
           <ac:grpSpMkLst>
             <pc:docMk/>
             <pc:sldMk cId="4155273118" sldId="256"/>
+            <ac:grpSpMk id="67" creationId="{58E62E77-BB6C-A046-35AA-DC05DBEFBFA1}"/>
+          </ac:grpSpMkLst>
+        </pc:grpChg>
+        <pc:grpChg chg="del mod topLvl">
+          <ac:chgData name="Fatima Pillosu" userId="a6295d4dc9e22643" providerId="LiveId" clId="{87453732-75AC-4426-B5D3-B7C69C2D4F54}" dt="2026-01-22T21:53:01.803" v="886" actId="165"/>
+          <ac:grpSpMkLst>
+            <pc:docMk/>
+            <pc:sldMk cId="4155273118" sldId="256"/>
+            <ac:grpSpMk id="73" creationId="{57E7CA52-9BF7-A4E2-C3A3-A8E7AC2240D5}"/>
+          </ac:grpSpMkLst>
+        </pc:grpChg>
+        <pc:grpChg chg="del mod">
+          <ac:chgData name="Fatima Pillosu" userId="a6295d4dc9e22643" providerId="LiveId" clId="{87453732-75AC-4426-B5D3-B7C69C2D4F54}" dt="2026-01-22T22:03:37.224" v="1040" actId="165"/>
+          <ac:grpSpMkLst>
+            <pc:docMk/>
+            <pc:sldMk cId="4155273118" sldId="256"/>
             <ac:grpSpMk id="82" creationId="{872DB2F7-6FAA-CB54-86FF-3765AD701207}"/>
+          </ac:grpSpMkLst>
+        </pc:grpChg>
+        <pc:grpChg chg="del mod topLvl">
+          <ac:chgData name="Fatima Pillosu" userId="a6295d4dc9e22643" providerId="LiveId" clId="{87453732-75AC-4426-B5D3-B7C69C2D4F54}" dt="2026-01-22T22:03:42.905" v="1041" actId="165"/>
+          <ac:grpSpMkLst>
+            <pc:docMk/>
+            <pc:sldMk cId="4155273118" sldId="256"/>
+            <ac:grpSpMk id="83" creationId="{9A6D2E77-AAF9-D3A8-D746-CFFEEFE17520}"/>
           </ac:grpSpMkLst>
         </pc:grpChg>
         <pc:picChg chg="add mod">
@@ -509,6 +613,22 @@
             <pc:docMk/>
             <pc:sldMk cId="4155273118" sldId="256"/>
             <ac:picMk id="3" creationId="{2EB6414C-6FBA-B99F-4B11-3F4E2CEE6F13}"/>
+          </ac:picMkLst>
+        </pc:picChg>
+        <pc:picChg chg="add mod">
+          <ac:chgData name="Fatima Pillosu" userId="a6295d4dc9e22643" providerId="LiveId" clId="{87453732-75AC-4426-B5D3-B7C69C2D4F54}" dt="2026-01-22T21:57:21.165" v="897" actId="1076"/>
+          <ac:picMkLst>
+            <pc:docMk/>
+            <pc:sldMk cId="4155273118" sldId="256"/>
+            <ac:picMk id="6" creationId="{44D84F46-CC9F-5F9C-D658-0E7843806A54}"/>
+          </ac:picMkLst>
+        </pc:picChg>
+        <pc:picChg chg="add mod">
+          <ac:chgData name="Fatima Pillosu" userId="a6295d4dc9e22643" providerId="LiveId" clId="{87453732-75AC-4426-B5D3-B7C69C2D4F54}" dt="2026-01-22T21:58:16.613" v="902" actId="1076"/>
+          <ac:picMkLst>
+            <pc:docMk/>
+            <pc:sldMk cId="4155273118" sldId="256"/>
+            <ac:picMk id="8" creationId="{CB885E2D-163B-453A-70BF-966A290C733E}"/>
           </ac:picMkLst>
         </pc:picChg>
         <pc:picChg chg="mod">
@@ -591,6 +711,30 @@
             <ac:picMk id="61" creationId="{F335CD81-03A7-E1AB-27C8-22963CF87DD5}"/>
           </ac:picMkLst>
         </pc:picChg>
+        <pc:picChg chg="del mod topLvl">
+          <ac:chgData name="Fatima Pillosu" userId="a6295d4dc9e22643" providerId="LiveId" clId="{87453732-75AC-4426-B5D3-B7C69C2D4F54}" dt="2026-01-22T21:57:37.576" v="898" actId="478"/>
+          <ac:picMkLst>
+            <pc:docMk/>
+            <pc:sldMk cId="4155273118" sldId="256"/>
+            <ac:picMk id="76" creationId="{65235F20-5D5A-B0D1-9DF3-817E37973F25}"/>
+          </ac:picMkLst>
+        </pc:picChg>
+        <pc:picChg chg="mod topLvl modCrop">
+          <ac:chgData name="Fatima Pillosu" userId="a6295d4dc9e22643" providerId="LiveId" clId="{87453732-75AC-4426-B5D3-B7C69C2D4F54}" dt="2026-01-22T21:53:11.338" v="887" actId="732"/>
+          <ac:picMkLst>
+            <pc:docMk/>
+            <pc:sldMk cId="4155273118" sldId="256"/>
+            <ac:picMk id="79" creationId="{95015480-EE54-E95F-17D5-9449DFA1515E}"/>
+          </ac:picMkLst>
+        </pc:picChg>
+        <pc:picChg chg="mod topLvl">
+          <ac:chgData name="Fatima Pillosu" userId="a6295d4dc9e22643" providerId="LiveId" clId="{87453732-75AC-4426-B5D3-B7C69C2D4F54}" dt="2026-01-22T22:04:02.330" v="1043" actId="164"/>
+          <ac:picMkLst>
+            <pc:docMk/>
+            <pc:sldMk cId="4155273118" sldId="256"/>
+            <ac:picMk id="85" creationId="{7C4F1250-5AF8-C7F6-9A78-271C75A6DE07}"/>
+          </ac:picMkLst>
+        </pc:picChg>
         <pc:cxnChg chg="add mod">
           <ac:chgData name="Fatima Pillosu" userId="a6295d4dc9e22643" providerId="LiveId" clId="{87453732-75AC-4426-B5D3-B7C69C2D4F54}" dt="2026-01-22T17:59:41.938" v="806" actId="164"/>
           <ac:cxnSpMkLst>
@@ -653,6 +797,22 @@
             <pc:docMk/>
             <pc:sldMk cId="4155273118" sldId="256"/>
             <ac:cxnSpMk id="65" creationId="{A813C677-2097-48E7-768D-695BBA32F8AE}"/>
+          </ac:cxnSpMkLst>
+        </pc:cxnChg>
+        <pc:cxnChg chg="mod topLvl">
+          <ac:chgData name="Fatima Pillosu" userId="a6295d4dc9e22643" providerId="LiveId" clId="{87453732-75AC-4426-B5D3-B7C69C2D4F54}" dt="2026-01-22T21:53:01.803" v="886" actId="165"/>
+          <ac:cxnSpMkLst>
+            <pc:docMk/>
+            <pc:sldMk cId="4155273118" sldId="256"/>
+            <ac:cxnSpMk id="77" creationId="{BE97EF98-9A66-8BDA-4C84-C4587285DC12}"/>
+          </ac:cxnSpMkLst>
+        </pc:cxnChg>
+        <pc:cxnChg chg="mod topLvl">
+          <ac:chgData name="Fatima Pillosu" userId="a6295d4dc9e22643" providerId="LiveId" clId="{87453732-75AC-4426-B5D3-B7C69C2D4F54}" dt="2026-01-22T21:53:01.803" v="886" actId="165"/>
+          <ac:cxnSpMkLst>
+            <pc:docMk/>
+            <pc:sldMk cId="4155273118" sldId="256"/>
+            <ac:cxnSpMk id="78" creationId="{C26835E8-78CD-484F-A375-25F0A5F987CE}"/>
           </ac:cxnSpMkLst>
         </pc:cxnChg>
         <pc:cxnChg chg="mod">
@@ -3905,944 +4065,602 @@
           </a:fontRef>
         </p:style>
       </p:cxnSp>
-      <p:grpSp>
-        <p:nvGrpSpPr>
-          <p:cNvPr id="66" name="Group 65">
+      <p:sp>
+        <p:nvSpPr>
+          <p:cNvPr id="69" name="TextBox 68">
             <a:extLst>
               <a:ext uri="{FF2B5EF4-FFF2-40B4-BE49-F238E27FC236}">
-                <a16:creationId xmlns:a16="http://schemas.microsoft.com/office/drawing/2014/main" id="{5E27E50A-D03C-22F6-0885-3C85A9CB3077}"/>
+                <a16:creationId xmlns:a16="http://schemas.microsoft.com/office/drawing/2014/main" id="{D5CD603C-4F13-FE2C-33B4-BDD84D975942}"/>
               </a:ext>
             </a:extLst>
           </p:cNvPr>
-          <p:cNvGrpSpPr/>
+          <p:cNvSpPr txBox="1"/>
           <p:nvPr/>
-        </p:nvGrpSpPr>
-        <p:grpSpPr>
+        </p:nvSpPr>
+        <p:spPr>
+          <a:xfrm>
+            <a:off x="1459624" y="508106"/>
+            <a:ext cx="1704708" cy="553998"/>
+          </a:xfrm>
+          <a:prstGeom prst="rect">
+            <a:avLst/>
+          </a:prstGeom>
+          <a:noFill/>
+          <a:ln w="3175">
+            <a:noFill/>
+          </a:ln>
+        </p:spPr>
+        <p:txBody>
+          <a:bodyPr wrap="square" rtlCol="0">
+            <a:spAutoFit/>
+          </a:bodyPr>
+          <a:lstStyle/>
+          <a:p>
+            <a:pPr algn="ctr"/>
+            <a:r>
+              <a:rPr lang="en-US" sz="1000" dirty="0">
+                <a:solidFill>
+                  <a:srgbClr val="333333"/>
+                </a:solidFill>
+                <a:latin typeface="Calibri Light" panose="020F0302020204030204" pitchFamily="34" charset="0"/>
+                <a:cs typeface="Calibri Light" panose="020F0302020204030204" pitchFamily="34" charset="0"/>
+              </a:rPr>
+              <a:t>(b)</a:t>
+            </a:r>
+          </a:p>
+          <a:p>
+            <a:pPr algn="ctr"/>
+            <a:r>
+              <a:rPr lang="en-US" sz="1000" dirty="0">
+                <a:solidFill>
+                  <a:srgbClr val="333333"/>
+                </a:solidFill>
+                <a:latin typeface="Calibri Light" panose="020F0302020204030204" pitchFamily="34" charset="0"/>
+                <a:cs typeface="Calibri Light" panose="020F0302020204030204" pitchFamily="34" charset="0"/>
+              </a:rPr>
+              <a:t>CREATION OF THE GRIDDED OBSERVATIONAL FIELDS</a:t>
+            </a:r>
+          </a:p>
+        </p:txBody>
+      </p:sp>
+      <p:sp>
+        <p:nvSpPr>
+          <p:cNvPr id="70" name="TextBox 69">
+            <a:extLst>
+              <a:ext uri="{FF2B5EF4-FFF2-40B4-BE49-F238E27FC236}">
+                <a16:creationId xmlns:a16="http://schemas.microsoft.com/office/drawing/2014/main" id="{CEFCF6D4-2C62-A7BB-A782-554728E33CCF}"/>
+              </a:ext>
+            </a:extLst>
+          </p:cNvPr>
+          <p:cNvSpPr txBox="1"/>
+          <p:nvPr/>
+        </p:nvSpPr>
+        <p:spPr>
+          <a:xfrm>
+            <a:off x="1459624" y="1154084"/>
+            <a:ext cx="1704708" cy="553998"/>
+          </a:xfrm>
+          <a:prstGeom prst="rect">
+            <a:avLst/>
+          </a:prstGeom>
+          <a:noFill/>
+          <a:ln w="3175">
+            <a:noFill/>
+          </a:ln>
+        </p:spPr>
+        <p:txBody>
+          <a:bodyPr wrap="square" rtlCol="0">
+            <a:spAutoFit/>
+          </a:bodyPr>
+          <a:lstStyle/>
+          <a:p>
+            <a:pPr algn="ctr"/>
+            <a:r>
+              <a:rPr lang="en-US" sz="1000" dirty="0">
+                <a:solidFill>
+                  <a:srgbClr val="333333"/>
+                </a:solidFill>
+                <a:latin typeface="Calibri Light" panose="020F0302020204030204" pitchFamily="34" charset="0"/>
+                <a:cs typeface="Calibri Light" panose="020F0302020204030204" pitchFamily="34" charset="0"/>
+              </a:rPr>
+              <a:t>Temporal grouping into 24-hourly (00 – 00 UTC) accumulation periods</a:t>
+            </a:r>
+          </a:p>
+        </p:txBody>
+      </p:sp>
+      <p:sp>
+        <p:nvSpPr>
+          <p:cNvPr id="71" name="TextBox 70">
+            <a:extLst>
+              <a:ext uri="{FF2B5EF4-FFF2-40B4-BE49-F238E27FC236}">
+                <a16:creationId xmlns:a16="http://schemas.microsoft.com/office/drawing/2014/main" id="{4B8F791A-03AF-6A2B-D08A-2FDC7562E899}"/>
+              </a:ext>
+            </a:extLst>
+          </p:cNvPr>
+          <p:cNvSpPr txBox="1"/>
+          <p:nvPr/>
+        </p:nvSpPr>
+        <p:spPr>
+          <a:xfrm>
+            <a:off x="1459624" y="1898419"/>
+            <a:ext cx="1704708" cy="553998"/>
+          </a:xfrm>
+          <a:prstGeom prst="rect">
+            <a:avLst/>
+          </a:prstGeom>
+          <a:noFill/>
+          <a:ln w="3175">
+            <a:noFill/>
+          </a:ln>
+        </p:spPr>
+        <p:txBody>
+          <a:bodyPr wrap="square" rtlCol="0">
+            <a:spAutoFit/>
+          </a:bodyPr>
+          <a:lstStyle/>
+          <a:p>
+            <a:pPr algn="ctr"/>
+            <a:r>
+              <a:rPr lang="en-US" sz="1000" dirty="0">
+                <a:solidFill>
+                  <a:srgbClr val="333333"/>
+                </a:solidFill>
+                <a:latin typeface="Calibri Light" panose="020F0302020204030204" pitchFamily="34" charset="0"/>
+                <a:cs typeface="Calibri Light" panose="020F0302020204030204" pitchFamily="34" charset="0"/>
+              </a:rPr>
+              <a:t>Spatial mapping into </a:t>
+            </a:r>
+          </a:p>
+          <a:p>
+            <a:pPr algn="ctr"/>
+            <a:r>
+              <a:rPr lang="en-US" sz="1000" dirty="0">
+                <a:solidFill>
+                  <a:srgbClr val="333333"/>
+                </a:solidFill>
+                <a:latin typeface="Calibri Light" panose="020F0302020204030204" pitchFamily="34" charset="0"/>
+                <a:cs typeface="Calibri Light" panose="020F0302020204030204" pitchFamily="34" charset="0"/>
+              </a:rPr>
+              <a:t>model grid (reduced Gaussian N320, 31 km)</a:t>
+            </a:r>
+          </a:p>
+        </p:txBody>
+      </p:sp>
+      <p:cxnSp>
+        <p:nvCxnSpPr>
+          <p:cNvPr id="72" name="Straight Arrow Connector 71">
+            <a:extLst>
+              <a:ext uri="{FF2B5EF4-FFF2-40B4-BE49-F238E27FC236}">
+                <a16:creationId xmlns:a16="http://schemas.microsoft.com/office/drawing/2014/main" id="{4AE24A63-4283-C348-E148-41789B854312}"/>
+              </a:ext>
+            </a:extLst>
+          </p:cNvPr>
+          <p:cNvCxnSpPr>
+            <a:cxnSpLocks/>
+          </p:cNvCxnSpPr>
+          <p:nvPr/>
+        </p:nvCxnSpPr>
+        <p:spPr>
+          <a:xfrm>
+            <a:off x="2311978" y="1715226"/>
+            <a:ext cx="0" cy="190337"/>
+          </a:xfrm>
+          <a:prstGeom prst="straightConnector1">
+            <a:avLst/>
+          </a:prstGeom>
+          <a:ln w="3175">
+            <a:solidFill>
+              <a:schemeClr val="tx1">
+                <a:lumMod val="65000"/>
+                <a:lumOff val="35000"/>
+              </a:schemeClr>
+            </a:solidFill>
+            <a:tailEnd type="triangle"/>
+          </a:ln>
+        </p:spPr>
+        <p:style>
+          <a:lnRef idx="2">
+            <a:schemeClr val="accent1"/>
+          </a:lnRef>
+          <a:fillRef idx="0">
+            <a:schemeClr val="accent1"/>
+          </a:fillRef>
+          <a:effectRef idx="1">
+            <a:schemeClr val="accent1"/>
+          </a:effectRef>
+          <a:fontRef idx="minor">
+            <a:schemeClr val="tx1"/>
+          </a:fontRef>
+        </p:style>
+      </p:cxnSp>
+      <p:cxnSp>
+        <p:nvCxnSpPr>
+          <p:cNvPr id="77" name="Straight Arrow Connector 76">
+            <a:extLst>
+              <a:ext uri="{FF2B5EF4-FFF2-40B4-BE49-F238E27FC236}">
+                <a16:creationId xmlns:a16="http://schemas.microsoft.com/office/drawing/2014/main" id="{BE97EF98-9A66-8BDA-4C84-C4587285DC12}"/>
+              </a:ext>
+            </a:extLst>
+          </p:cNvPr>
+          <p:cNvCxnSpPr>
+            <a:cxnSpLocks/>
+          </p:cNvCxnSpPr>
+          <p:nvPr/>
+        </p:nvCxnSpPr>
+        <p:spPr>
+          <a:xfrm>
+            <a:off x="1817974" y="2510749"/>
+            <a:ext cx="0" cy="190337"/>
+          </a:xfrm>
+          <a:prstGeom prst="straightConnector1">
+            <a:avLst/>
+          </a:prstGeom>
+          <a:ln w="3175">
+            <a:solidFill>
+              <a:schemeClr val="tx1">
+                <a:lumMod val="65000"/>
+                <a:lumOff val="35000"/>
+              </a:schemeClr>
+            </a:solidFill>
+            <a:tailEnd type="triangle"/>
+          </a:ln>
+        </p:spPr>
+        <p:style>
+          <a:lnRef idx="2">
+            <a:schemeClr val="accent1"/>
+          </a:lnRef>
+          <a:fillRef idx="0">
+            <a:schemeClr val="accent1"/>
+          </a:fillRef>
+          <a:effectRef idx="1">
+            <a:schemeClr val="accent1"/>
+          </a:effectRef>
+          <a:fontRef idx="minor">
+            <a:schemeClr val="tx1"/>
+          </a:fontRef>
+        </p:style>
+      </p:cxnSp>
+      <p:cxnSp>
+        <p:nvCxnSpPr>
+          <p:cNvPr id="78" name="Straight Arrow Connector 77">
+            <a:extLst>
+              <a:ext uri="{FF2B5EF4-FFF2-40B4-BE49-F238E27FC236}">
+                <a16:creationId xmlns:a16="http://schemas.microsoft.com/office/drawing/2014/main" id="{C26835E8-78CD-484F-A375-25F0A5F987CE}"/>
+              </a:ext>
+            </a:extLst>
+          </p:cNvPr>
+          <p:cNvCxnSpPr>
+            <a:cxnSpLocks/>
+          </p:cNvCxnSpPr>
+          <p:nvPr/>
+        </p:nvCxnSpPr>
+        <p:spPr>
+          <a:xfrm>
+            <a:off x="2721695" y="2510749"/>
+            <a:ext cx="0" cy="190337"/>
+          </a:xfrm>
+          <a:prstGeom prst="straightConnector1">
+            <a:avLst/>
+          </a:prstGeom>
+          <a:ln w="3175">
+            <a:solidFill>
+              <a:schemeClr val="tx1">
+                <a:lumMod val="65000"/>
+                <a:lumOff val="35000"/>
+              </a:schemeClr>
+            </a:solidFill>
+            <a:tailEnd type="triangle"/>
+          </a:ln>
+        </p:spPr>
+        <p:style>
+          <a:lnRef idx="2">
+            <a:schemeClr val="accent1"/>
+          </a:lnRef>
+          <a:fillRef idx="0">
+            <a:schemeClr val="accent1"/>
+          </a:fillRef>
+          <a:effectRef idx="1">
+            <a:schemeClr val="accent1"/>
+          </a:effectRef>
+          <a:fontRef idx="minor">
+            <a:schemeClr val="tx1"/>
+          </a:fontRef>
+        </p:style>
+      </p:cxnSp>
+      <p:pic>
+        <p:nvPicPr>
+          <p:cNvPr id="79" name="Picture 78">
+            <a:extLst>
+              <a:ext uri="{FF2B5EF4-FFF2-40B4-BE49-F238E27FC236}">
+                <a16:creationId xmlns:a16="http://schemas.microsoft.com/office/drawing/2014/main" id="{95015480-EE54-E95F-17D5-9449DFA1515E}"/>
+              </a:ext>
+            </a:extLst>
+          </p:cNvPr>
+          <p:cNvPicPr>
+            <a:picLocks noChangeAspect="1"/>
+          </p:cNvPicPr>
+          <p:nvPr/>
+        </p:nvPicPr>
+        <p:blipFill>
+          <a:blip r:embed="rId3"/>
+          <a:srcRect l="55325"/>
+          <a:stretch>
+            <a:fillRect/>
+          </a:stretch>
+        </p:blipFill>
+        <p:spPr>
+          <a:xfrm>
+            <a:off x="2370406" y="3135855"/>
+            <a:ext cx="729922" cy="715219"/>
+          </a:xfrm>
+          <a:prstGeom prst="rect">
+            <a:avLst/>
+          </a:prstGeom>
+        </p:spPr>
+      </p:pic>
+      <p:sp>
+        <p:nvSpPr>
+          <p:cNvPr id="80" name="TextBox 79">
+            <a:extLst>
+              <a:ext uri="{FF2B5EF4-FFF2-40B4-BE49-F238E27FC236}">
+                <a16:creationId xmlns:a16="http://schemas.microsoft.com/office/drawing/2014/main" id="{D9D865EB-1F18-14FE-26C7-19BAF52B20E4}"/>
+              </a:ext>
+            </a:extLst>
+          </p:cNvPr>
+          <p:cNvSpPr txBox="1"/>
+          <p:nvPr/>
+        </p:nvSpPr>
+        <p:spPr>
+          <a:xfrm>
+            <a:off x="1500718" y="2711778"/>
+            <a:ext cx="677300" cy="461665"/>
+          </a:xfrm>
+          <a:prstGeom prst="rect">
+            <a:avLst/>
+          </a:prstGeom>
+          <a:noFill/>
+          <a:ln w="3175">
+            <a:noFill/>
+          </a:ln>
+        </p:spPr>
+        <p:txBody>
+          <a:bodyPr wrap="square" rtlCol="0">
+            <a:spAutoFit/>
+          </a:bodyPr>
+          <a:lstStyle/>
+          <a:p>
+            <a:pPr algn="ctr"/>
+            <a:r>
+              <a:rPr lang="en-US" sz="800" dirty="0">
+                <a:solidFill>
+                  <a:srgbClr val="333333"/>
+                </a:solidFill>
+                <a:latin typeface="Calibri Light" panose="020F0302020204030204" pitchFamily="34" charset="0"/>
+                <a:cs typeface="Calibri Light" panose="020F0302020204030204" pitchFamily="34" charset="0"/>
+              </a:rPr>
+              <a:t>Point report</a:t>
+            </a:r>
+          </a:p>
+          <a:p>
+            <a:pPr algn="ctr"/>
+            <a:r>
+              <a:rPr lang="en-US" sz="800" dirty="0">
+                <a:solidFill>
+                  <a:srgbClr val="333333"/>
+                </a:solidFill>
+                <a:latin typeface="Calibri Light" panose="020F0302020204030204" pitchFamily="34" charset="0"/>
+                <a:cs typeface="Calibri Light" panose="020F0302020204030204" pitchFamily="34" charset="0"/>
+              </a:rPr>
+              <a:t>(Nearest grid-box)</a:t>
+            </a:r>
+          </a:p>
+        </p:txBody>
+      </p:sp>
+      <p:sp>
+        <p:nvSpPr>
+          <p:cNvPr id="81" name="TextBox 80">
+            <a:extLst>
+              <a:ext uri="{FF2B5EF4-FFF2-40B4-BE49-F238E27FC236}">
+                <a16:creationId xmlns:a16="http://schemas.microsoft.com/office/drawing/2014/main" id="{B7816E59-8B07-4D98-C917-C42CC54168D5}"/>
+              </a:ext>
+            </a:extLst>
+          </p:cNvPr>
+          <p:cNvSpPr txBox="1"/>
+          <p:nvPr/>
+        </p:nvSpPr>
+        <p:spPr>
+          <a:xfrm>
+            <a:off x="2308423" y="2711778"/>
+            <a:ext cx="849056" cy="461665"/>
+          </a:xfrm>
+          <a:prstGeom prst="rect">
+            <a:avLst/>
+          </a:prstGeom>
+          <a:noFill/>
+          <a:ln w="3175">
+            <a:noFill/>
+          </a:ln>
+        </p:spPr>
+        <p:txBody>
+          <a:bodyPr wrap="square" rtlCol="0">
+            <a:spAutoFit/>
+          </a:bodyPr>
+          <a:lstStyle/>
+          <a:p>
+            <a:pPr algn="ctr"/>
+            <a:r>
+              <a:rPr lang="en-US" sz="800" dirty="0">
+                <a:solidFill>
+                  <a:srgbClr val="333333"/>
+                </a:solidFill>
+                <a:latin typeface="Calibri Light" panose="020F0302020204030204" pitchFamily="34" charset="0"/>
+                <a:cs typeface="Calibri Light" panose="020F0302020204030204" pitchFamily="34" charset="0"/>
+              </a:rPr>
+              <a:t>Polygon report</a:t>
+            </a:r>
+          </a:p>
+          <a:p>
+            <a:pPr algn="ctr"/>
+            <a:r>
+              <a:rPr lang="en-US" sz="800" dirty="0">
+                <a:solidFill>
+                  <a:srgbClr val="333333"/>
+                </a:solidFill>
+                <a:latin typeface="Calibri Light" panose="020F0302020204030204" pitchFamily="34" charset="0"/>
+                <a:cs typeface="Calibri Light" panose="020F0302020204030204" pitchFamily="34" charset="0"/>
+              </a:rPr>
+              <a:t>(All grid-boxes within polygon)</a:t>
+            </a:r>
+          </a:p>
+        </p:txBody>
+      </p:sp>
+      <p:sp>
+        <p:nvSpPr>
+          <p:cNvPr id="74" name="TextBox 73">
+            <a:extLst>
+              <a:ext uri="{FF2B5EF4-FFF2-40B4-BE49-F238E27FC236}">
+                <a16:creationId xmlns:a16="http://schemas.microsoft.com/office/drawing/2014/main" id="{2B01569A-59C1-0E07-4C8F-764E4ED22059}"/>
+              </a:ext>
+            </a:extLst>
+          </p:cNvPr>
+          <p:cNvSpPr txBox="1"/>
+          <p:nvPr/>
+        </p:nvSpPr>
+        <p:spPr>
+          <a:xfrm>
+            <a:off x="1563055" y="4109211"/>
+            <a:ext cx="1497846" cy="400110"/>
+          </a:xfrm>
+          <a:prstGeom prst="rect">
+            <a:avLst/>
+          </a:prstGeom>
+          <a:noFill/>
+          <a:ln w="3175">
+            <a:noFill/>
+          </a:ln>
+        </p:spPr>
+        <p:txBody>
+          <a:bodyPr wrap="square" rtlCol="0">
+            <a:spAutoFit/>
+          </a:bodyPr>
+          <a:lstStyle/>
+          <a:p>
+            <a:pPr algn="ctr"/>
+            <a:r>
+              <a:rPr lang="en-US" sz="1000" dirty="0">
+                <a:solidFill>
+                  <a:srgbClr val="333333"/>
+                </a:solidFill>
+                <a:latin typeface="Calibri Light" panose="020F0302020204030204" pitchFamily="34" charset="0"/>
+                <a:cs typeface="Calibri Light" panose="020F0302020204030204" pitchFamily="34" charset="0"/>
+              </a:rPr>
+              <a:t>Count the number of reports in each grid-box</a:t>
+            </a:r>
+          </a:p>
+        </p:txBody>
+      </p:sp>
+      <p:cxnSp>
+        <p:nvCxnSpPr>
+          <p:cNvPr id="75" name="Straight Arrow Connector 74">
+            <a:extLst>
+              <a:ext uri="{FF2B5EF4-FFF2-40B4-BE49-F238E27FC236}">
+                <a16:creationId xmlns:a16="http://schemas.microsoft.com/office/drawing/2014/main" id="{5667AB7E-0F25-A398-F0F1-25358AC8EBA7}"/>
+              </a:ext>
+            </a:extLst>
+          </p:cNvPr>
+          <p:cNvCxnSpPr>
+            <a:cxnSpLocks/>
+          </p:cNvCxnSpPr>
+          <p:nvPr/>
+        </p:nvCxnSpPr>
+        <p:spPr>
+          <a:xfrm>
+            <a:off x="2278110" y="3918874"/>
+            <a:ext cx="0" cy="190337"/>
+          </a:xfrm>
+          <a:prstGeom prst="straightConnector1">
+            <a:avLst/>
+          </a:prstGeom>
+          <a:ln w="3175">
+            <a:solidFill>
+              <a:schemeClr val="tx1">
+                <a:lumMod val="65000"/>
+                <a:lumOff val="35000"/>
+              </a:schemeClr>
+            </a:solidFill>
+            <a:tailEnd type="triangle"/>
+          </a:ln>
+        </p:spPr>
+        <p:style>
+          <a:lnRef idx="2">
+            <a:schemeClr val="accent1"/>
+          </a:lnRef>
+          <a:fillRef idx="0">
+            <a:schemeClr val="accent1"/>
+          </a:fillRef>
+          <a:effectRef idx="1">
+            <a:schemeClr val="accent1"/>
+          </a:effectRef>
+          <a:fontRef idx="minor">
+            <a:schemeClr val="tx1"/>
+          </a:fontRef>
+        </p:style>
+      </p:cxnSp>
+      <p:sp>
+        <p:nvSpPr>
+          <p:cNvPr id="68" name="Rectangle 67">
+            <a:extLst>
+              <a:ext uri="{FF2B5EF4-FFF2-40B4-BE49-F238E27FC236}">
+                <a16:creationId xmlns:a16="http://schemas.microsoft.com/office/drawing/2014/main" id="{A7B0EF48-DED5-5148-BBEE-84B972A0A0F8}"/>
+              </a:ext>
+            </a:extLst>
+          </p:cNvPr>
+          <p:cNvSpPr/>
+          <p:nvPr/>
+        </p:nvSpPr>
+        <p:spPr>
           <a:xfrm>
             <a:off x="1405013" y="453956"/>
             <a:ext cx="1759319" cy="4857709"/>
-            <a:chOff x="1851043" y="501686"/>
-            <a:chExt cx="1759319" cy="4857709"/>
           </a:xfrm>
-        </p:grpSpPr>
-        <p:grpSp>
-          <p:nvGrpSpPr>
-            <p:cNvPr id="67" name="Group 66">
-              <a:extLst>
-                <a:ext uri="{FF2B5EF4-FFF2-40B4-BE49-F238E27FC236}">
-                  <a16:creationId xmlns:a16="http://schemas.microsoft.com/office/drawing/2014/main" id="{58E62E77-BB6C-A046-35AA-DC05DBEFBFA1}"/>
-                </a:ext>
-              </a:extLst>
-            </p:cNvPr>
-            <p:cNvGrpSpPr/>
-            <p:nvPr/>
-          </p:nvGrpSpPr>
-          <p:grpSpPr>
-            <a:xfrm>
-              <a:off x="1905654" y="555836"/>
-              <a:ext cx="1704708" cy="4709101"/>
-              <a:chOff x="1115138" y="555836"/>
-              <a:chExt cx="1704708" cy="4709101"/>
-            </a:xfrm>
-          </p:grpSpPr>
-          <p:sp>
-            <p:nvSpPr>
-              <p:cNvPr id="69" name="TextBox 68">
-                <a:extLst>
-                  <a:ext uri="{FF2B5EF4-FFF2-40B4-BE49-F238E27FC236}">
-                    <a16:creationId xmlns:a16="http://schemas.microsoft.com/office/drawing/2014/main" id="{D5CD603C-4F13-FE2C-33B4-BDD84D975942}"/>
-                  </a:ext>
-                </a:extLst>
-              </p:cNvPr>
-              <p:cNvSpPr txBox="1"/>
-              <p:nvPr/>
-            </p:nvSpPr>
-            <p:spPr>
-              <a:xfrm>
-                <a:off x="1115138" y="555836"/>
-                <a:ext cx="1704708" cy="553998"/>
-              </a:xfrm>
-              <a:prstGeom prst="rect">
-                <a:avLst/>
-              </a:prstGeom>
-              <a:noFill/>
-              <a:ln w="3175">
-                <a:noFill/>
-              </a:ln>
-            </p:spPr>
-            <p:txBody>
-              <a:bodyPr wrap="square" rtlCol="0">
-                <a:spAutoFit/>
-              </a:bodyPr>
-              <a:lstStyle/>
-              <a:p>
-                <a:pPr algn="ctr"/>
-                <a:r>
-                  <a:rPr lang="en-US" sz="1000" dirty="0">
-                    <a:solidFill>
-                      <a:srgbClr val="333333"/>
-                    </a:solidFill>
-                    <a:latin typeface="Calibri Light" panose="020F0302020204030204" pitchFamily="34" charset="0"/>
-                    <a:cs typeface="Calibri Light" panose="020F0302020204030204" pitchFamily="34" charset="0"/>
-                  </a:rPr>
-                  <a:t>(b)</a:t>
-                </a:r>
-              </a:p>
-              <a:p>
-                <a:pPr algn="ctr"/>
-                <a:r>
-                  <a:rPr lang="en-US" sz="1000" dirty="0">
-                    <a:solidFill>
-                      <a:srgbClr val="333333"/>
-                    </a:solidFill>
-                    <a:latin typeface="Calibri Light" panose="020F0302020204030204" pitchFamily="34" charset="0"/>
-                    <a:cs typeface="Calibri Light" panose="020F0302020204030204" pitchFamily="34" charset="0"/>
-                  </a:rPr>
-                  <a:t>CREATION OF THE GRIDDED OBSERVATIONAL FIELDS</a:t>
-                </a:r>
-              </a:p>
-            </p:txBody>
-          </p:sp>
-          <p:sp>
-            <p:nvSpPr>
-              <p:cNvPr id="70" name="TextBox 69">
-                <a:extLst>
-                  <a:ext uri="{FF2B5EF4-FFF2-40B4-BE49-F238E27FC236}">
-                    <a16:creationId xmlns:a16="http://schemas.microsoft.com/office/drawing/2014/main" id="{CEFCF6D4-2C62-A7BB-A782-554728E33CCF}"/>
-                  </a:ext>
-                </a:extLst>
-              </p:cNvPr>
-              <p:cNvSpPr txBox="1"/>
-              <p:nvPr/>
-            </p:nvSpPr>
-            <p:spPr>
-              <a:xfrm>
-                <a:off x="1115138" y="1201814"/>
-                <a:ext cx="1704708" cy="553998"/>
-              </a:xfrm>
-              <a:prstGeom prst="rect">
-                <a:avLst/>
-              </a:prstGeom>
-              <a:noFill/>
-              <a:ln w="3175">
-                <a:noFill/>
-              </a:ln>
-            </p:spPr>
-            <p:txBody>
-              <a:bodyPr wrap="square" rtlCol="0">
-                <a:spAutoFit/>
-              </a:bodyPr>
-              <a:lstStyle/>
-              <a:p>
-                <a:pPr algn="ctr"/>
-                <a:r>
-                  <a:rPr lang="en-US" sz="1000" dirty="0">
-                    <a:solidFill>
-                      <a:srgbClr val="333333"/>
-                    </a:solidFill>
-                    <a:latin typeface="Calibri Light" panose="020F0302020204030204" pitchFamily="34" charset="0"/>
-                    <a:cs typeface="Calibri Light" panose="020F0302020204030204" pitchFamily="34" charset="0"/>
-                  </a:rPr>
-                  <a:t>Temporal grouping into 24-hourly (00 – 00 UTC) accumulation periods</a:t>
-                </a:r>
-              </a:p>
-            </p:txBody>
-          </p:sp>
-          <p:sp>
-            <p:nvSpPr>
-              <p:cNvPr id="71" name="TextBox 70">
-                <a:extLst>
-                  <a:ext uri="{FF2B5EF4-FFF2-40B4-BE49-F238E27FC236}">
-                    <a16:creationId xmlns:a16="http://schemas.microsoft.com/office/drawing/2014/main" id="{4B8F791A-03AF-6A2B-D08A-2FDC7562E899}"/>
-                  </a:ext>
-                </a:extLst>
-              </p:cNvPr>
-              <p:cNvSpPr txBox="1"/>
-              <p:nvPr/>
-            </p:nvSpPr>
-            <p:spPr>
-              <a:xfrm>
-                <a:off x="1115138" y="1946149"/>
-                <a:ext cx="1704708" cy="553998"/>
-              </a:xfrm>
-              <a:prstGeom prst="rect">
-                <a:avLst/>
-              </a:prstGeom>
-              <a:noFill/>
-              <a:ln w="3175">
-                <a:noFill/>
-              </a:ln>
-            </p:spPr>
-            <p:txBody>
-              <a:bodyPr wrap="square" rtlCol="0">
-                <a:spAutoFit/>
-              </a:bodyPr>
-              <a:lstStyle/>
-              <a:p>
-                <a:pPr algn="ctr"/>
-                <a:r>
-                  <a:rPr lang="en-US" sz="1000" dirty="0">
-                    <a:solidFill>
-                      <a:srgbClr val="333333"/>
-                    </a:solidFill>
-                    <a:latin typeface="Calibri Light" panose="020F0302020204030204" pitchFamily="34" charset="0"/>
-                    <a:cs typeface="Calibri Light" panose="020F0302020204030204" pitchFamily="34" charset="0"/>
-                  </a:rPr>
-                  <a:t>Spatial mapping into </a:t>
-                </a:r>
-              </a:p>
-              <a:p>
-                <a:pPr algn="ctr"/>
-                <a:r>
-                  <a:rPr lang="en-US" sz="1000" dirty="0">
-                    <a:solidFill>
-                      <a:srgbClr val="333333"/>
-                    </a:solidFill>
-                    <a:latin typeface="Calibri Light" panose="020F0302020204030204" pitchFamily="34" charset="0"/>
-                    <a:cs typeface="Calibri Light" panose="020F0302020204030204" pitchFamily="34" charset="0"/>
-                  </a:rPr>
-                  <a:t>model grid (reduced Gaussian N320, 31 km)</a:t>
-                </a:r>
-              </a:p>
-            </p:txBody>
-          </p:sp>
-          <p:cxnSp>
-            <p:nvCxnSpPr>
-              <p:cNvPr id="72" name="Straight Arrow Connector 71">
-                <a:extLst>
-                  <a:ext uri="{FF2B5EF4-FFF2-40B4-BE49-F238E27FC236}">
-                    <a16:creationId xmlns:a16="http://schemas.microsoft.com/office/drawing/2014/main" id="{4AE24A63-4283-C348-E148-41789B854312}"/>
-                  </a:ext>
-                </a:extLst>
-              </p:cNvPr>
-              <p:cNvCxnSpPr>
-                <a:cxnSpLocks/>
-              </p:cNvCxnSpPr>
-              <p:nvPr/>
-            </p:nvCxnSpPr>
-            <p:spPr>
-              <a:xfrm>
-                <a:off x="1967492" y="1762956"/>
-                <a:ext cx="0" cy="190337"/>
-              </a:xfrm>
-              <a:prstGeom prst="straightConnector1">
-                <a:avLst/>
-              </a:prstGeom>
-              <a:ln w="3175">
-                <a:solidFill>
-                  <a:schemeClr val="tx1">
-                    <a:lumMod val="65000"/>
-                    <a:lumOff val="35000"/>
-                  </a:schemeClr>
-                </a:solidFill>
-                <a:tailEnd type="triangle"/>
-              </a:ln>
-            </p:spPr>
-            <p:style>
-              <a:lnRef idx="2">
-                <a:schemeClr val="accent1"/>
-              </a:lnRef>
-              <a:fillRef idx="0">
-                <a:schemeClr val="accent1"/>
-              </a:fillRef>
-              <a:effectRef idx="1">
-                <a:schemeClr val="accent1"/>
-              </a:effectRef>
-              <a:fontRef idx="minor">
-                <a:schemeClr val="tx1"/>
-              </a:fontRef>
-            </p:style>
-          </p:cxnSp>
-          <p:grpSp>
-            <p:nvGrpSpPr>
-              <p:cNvPr id="73" name="Group 72">
-                <a:extLst>
-                  <a:ext uri="{FF2B5EF4-FFF2-40B4-BE49-F238E27FC236}">
-                    <a16:creationId xmlns:a16="http://schemas.microsoft.com/office/drawing/2014/main" id="{57E7CA52-9BF7-A4E2-C3A3-A8E7AC2240D5}"/>
-                  </a:ext>
-                </a:extLst>
-              </p:cNvPr>
-              <p:cNvGrpSpPr/>
-              <p:nvPr/>
-            </p:nvGrpSpPr>
-            <p:grpSpPr>
-              <a:xfrm>
-                <a:off x="1121992" y="2558479"/>
-                <a:ext cx="1691001" cy="1340325"/>
-                <a:chOff x="1139706" y="2558479"/>
-                <a:chExt cx="1691001" cy="1340325"/>
-              </a:xfrm>
-            </p:grpSpPr>
-            <p:cxnSp>
-              <p:nvCxnSpPr>
-                <p:cNvPr id="77" name="Straight Arrow Connector 76">
-                  <a:extLst>
-                    <a:ext uri="{FF2B5EF4-FFF2-40B4-BE49-F238E27FC236}">
-                      <a16:creationId xmlns:a16="http://schemas.microsoft.com/office/drawing/2014/main" id="{BE97EF98-9A66-8BDA-4C84-C4587285DC12}"/>
-                    </a:ext>
-                  </a:extLst>
-                </p:cNvPr>
-                <p:cNvCxnSpPr>
-                  <a:cxnSpLocks/>
-                </p:cNvCxnSpPr>
-                <p:nvPr/>
-              </p:nvCxnSpPr>
-              <p:spPr>
-                <a:xfrm>
-                  <a:off x="1491202" y="2558479"/>
-                  <a:ext cx="0" cy="190337"/>
-                </a:xfrm>
-                <a:prstGeom prst="straightConnector1">
-                  <a:avLst/>
-                </a:prstGeom>
-                <a:ln w="3175">
-                  <a:solidFill>
-                    <a:schemeClr val="tx1">
-                      <a:lumMod val="65000"/>
-                      <a:lumOff val="35000"/>
-                    </a:schemeClr>
-                  </a:solidFill>
-                  <a:tailEnd type="triangle"/>
-                </a:ln>
-              </p:spPr>
-              <p:style>
-                <a:lnRef idx="2">
-                  <a:schemeClr val="accent1"/>
-                </a:lnRef>
-                <a:fillRef idx="0">
-                  <a:schemeClr val="accent1"/>
-                </a:fillRef>
-                <a:effectRef idx="1">
-                  <a:schemeClr val="accent1"/>
-                </a:effectRef>
-                <a:fontRef idx="minor">
-                  <a:schemeClr val="tx1"/>
-                </a:fontRef>
-              </p:style>
-            </p:cxnSp>
-            <p:cxnSp>
-              <p:nvCxnSpPr>
-                <p:cNvPr id="78" name="Straight Arrow Connector 77">
-                  <a:extLst>
-                    <a:ext uri="{FF2B5EF4-FFF2-40B4-BE49-F238E27FC236}">
-                      <a16:creationId xmlns:a16="http://schemas.microsoft.com/office/drawing/2014/main" id="{C26835E8-78CD-484F-A375-25F0A5F987CE}"/>
-                    </a:ext>
-                  </a:extLst>
-                </p:cNvPr>
-                <p:cNvCxnSpPr>
-                  <a:cxnSpLocks/>
-                </p:cNvCxnSpPr>
-                <p:nvPr/>
-              </p:nvCxnSpPr>
-              <p:spPr>
-                <a:xfrm>
-                  <a:off x="2394923" y="2558479"/>
-                  <a:ext cx="0" cy="190337"/>
-                </a:xfrm>
-                <a:prstGeom prst="straightConnector1">
-                  <a:avLst/>
-                </a:prstGeom>
-                <a:ln w="3175">
-                  <a:solidFill>
-                    <a:schemeClr val="tx1">
-                      <a:lumMod val="65000"/>
-                      <a:lumOff val="35000"/>
-                    </a:schemeClr>
-                  </a:solidFill>
-                  <a:tailEnd type="triangle"/>
-                </a:ln>
-              </p:spPr>
-              <p:style>
-                <a:lnRef idx="2">
-                  <a:schemeClr val="accent1"/>
-                </a:lnRef>
-                <a:fillRef idx="0">
-                  <a:schemeClr val="accent1"/>
-                </a:fillRef>
-                <a:effectRef idx="1">
-                  <a:schemeClr val="accent1"/>
-                </a:effectRef>
-                <a:fontRef idx="minor">
-                  <a:schemeClr val="tx1"/>
-                </a:fontRef>
-              </p:style>
-            </p:cxnSp>
-            <p:pic>
-              <p:nvPicPr>
-                <p:cNvPr id="79" name="Picture 78">
-                  <a:extLst>
-                    <a:ext uri="{FF2B5EF4-FFF2-40B4-BE49-F238E27FC236}">
-                      <a16:creationId xmlns:a16="http://schemas.microsoft.com/office/drawing/2014/main" id="{95015480-EE54-E95F-17D5-9449DFA1515E}"/>
-                    </a:ext>
-                  </a:extLst>
-                </p:cNvPr>
-                <p:cNvPicPr>
-                  <a:picLocks noChangeAspect="1"/>
-                </p:cNvPicPr>
-                <p:nvPr/>
-              </p:nvPicPr>
-              <p:blipFill>
-                <a:blip r:embed="rId3"/>
-                <a:stretch>
-                  <a:fillRect/>
-                </a:stretch>
-              </p:blipFill>
-              <p:spPr>
-                <a:xfrm>
-                  <a:off x="1139706" y="3183585"/>
-                  <a:ext cx="1633850" cy="715219"/>
-                </a:xfrm>
-                <a:prstGeom prst="rect">
-                  <a:avLst/>
-                </a:prstGeom>
-              </p:spPr>
-            </p:pic>
-            <p:sp>
-              <p:nvSpPr>
-                <p:cNvPr id="80" name="TextBox 79">
-                  <a:extLst>
-                    <a:ext uri="{FF2B5EF4-FFF2-40B4-BE49-F238E27FC236}">
-                      <a16:creationId xmlns:a16="http://schemas.microsoft.com/office/drawing/2014/main" id="{D9D865EB-1F18-14FE-26C7-19BAF52B20E4}"/>
-                    </a:ext>
-                  </a:extLst>
-                </p:cNvPr>
-                <p:cNvSpPr txBox="1"/>
-                <p:nvPr/>
-              </p:nvSpPr>
-              <p:spPr>
-                <a:xfrm>
-                  <a:off x="1173946" y="2759508"/>
-                  <a:ext cx="677300" cy="461665"/>
-                </a:xfrm>
-                <a:prstGeom prst="rect">
-                  <a:avLst/>
-                </a:prstGeom>
-                <a:noFill/>
-                <a:ln w="3175">
-                  <a:noFill/>
-                </a:ln>
-              </p:spPr>
-              <p:txBody>
-                <a:bodyPr wrap="square" rtlCol="0">
-                  <a:spAutoFit/>
-                </a:bodyPr>
-                <a:lstStyle/>
-                <a:p>
-                  <a:pPr algn="ctr"/>
-                  <a:r>
-                    <a:rPr lang="en-US" sz="800" dirty="0">
-                      <a:solidFill>
-                        <a:srgbClr val="333333"/>
-                      </a:solidFill>
-                      <a:latin typeface="Calibri Light" panose="020F0302020204030204" pitchFamily="34" charset="0"/>
-                      <a:cs typeface="Calibri Light" panose="020F0302020204030204" pitchFamily="34" charset="0"/>
-                    </a:rPr>
-                    <a:t>Point report</a:t>
-                  </a:r>
-                </a:p>
-                <a:p>
-                  <a:pPr algn="ctr"/>
-                  <a:r>
-                    <a:rPr lang="en-US" sz="800" dirty="0">
-                      <a:solidFill>
-                        <a:srgbClr val="333333"/>
-                      </a:solidFill>
-                      <a:latin typeface="Calibri Light" panose="020F0302020204030204" pitchFamily="34" charset="0"/>
-                      <a:cs typeface="Calibri Light" panose="020F0302020204030204" pitchFamily="34" charset="0"/>
-                    </a:rPr>
-                    <a:t>(Nearest grid-box)</a:t>
-                  </a:r>
-                </a:p>
-              </p:txBody>
-            </p:sp>
-            <p:sp>
-              <p:nvSpPr>
-                <p:cNvPr id="81" name="TextBox 80">
-                  <a:extLst>
-                    <a:ext uri="{FF2B5EF4-FFF2-40B4-BE49-F238E27FC236}">
-                      <a16:creationId xmlns:a16="http://schemas.microsoft.com/office/drawing/2014/main" id="{B7816E59-8B07-4D98-C917-C42CC54168D5}"/>
-                    </a:ext>
-                  </a:extLst>
-                </p:cNvPr>
-                <p:cNvSpPr txBox="1"/>
-                <p:nvPr/>
-              </p:nvSpPr>
-              <p:spPr>
-                <a:xfrm>
-                  <a:off x="1981651" y="2759508"/>
-                  <a:ext cx="849056" cy="461665"/>
-                </a:xfrm>
-                <a:prstGeom prst="rect">
-                  <a:avLst/>
-                </a:prstGeom>
-                <a:noFill/>
-                <a:ln w="3175">
-                  <a:noFill/>
-                </a:ln>
-              </p:spPr>
-              <p:txBody>
-                <a:bodyPr wrap="square" rtlCol="0">
-                  <a:spAutoFit/>
-                </a:bodyPr>
-                <a:lstStyle/>
-                <a:p>
-                  <a:pPr algn="ctr"/>
-                  <a:r>
-                    <a:rPr lang="en-US" sz="800" dirty="0">
-                      <a:solidFill>
-                        <a:srgbClr val="333333"/>
-                      </a:solidFill>
-                      <a:latin typeface="Calibri Light" panose="020F0302020204030204" pitchFamily="34" charset="0"/>
-                      <a:cs typeface="Calibri Light" panose="020F0302020204030204" pitchFamily="34" charset="0"/>
-                    </a:rPr>
-                    <a:t>Polygon report</a:t>
-                  </a:r>
-                </a:p>
-                <a:p>
-                  <a:pPr algn="ctr"/>
-                  <a:r>
-                    <a:rPr lang="en-US" sz="800" dirty="0">
-                      <a:solidFill>
-                        <a:srgbClr val="333333"/>
-                      </a:solidFill>
-                      <a:latin typeface="Calibri Light" panose="020F0302020204030204" pitchFamily="34" charset="0"/>
-                      <a:cs typeface="Calibri Light" panose="020F0302020204030204" pitchFamily="34" charset="0"/>
-                    </a:rPr>
-                    <a:t>(All grid-boxes within polygon)</a:t>
-                  </a:r>
-                </a:p>
-              </p:txBody>
-            </p:sp>
-          </p:grpSp>
-          <p:sp>
-            <p:nvSpPr>
-              <p:cNvPr id="74" name="TextBox 73">
-                <a:extLst>
-                  <a:ext uri="{FF2B5EF4-FFF2-40B4-BE49-F238E27FC236}">
-                    <a16:creationId xmlns:a16="http://schemas.microsoft.com/office/drawing/2014/main" id="{2B01569A-59C1-0E07-4C8F-764E4ED22059}"/>
-                  </a:ext>
-                </a:extLst>
-              </p:cNvPr>
-              <p:cNvSpPr txBox="1"/>
-              <p:nvPr/>
-            </p:nvSpPr>
-            <p:spPr>
-              <a:xfrm>
-                <a:off x="1218569" y="4156941"/>
-                <a:ext cx="1497846" cy="400110"/>
-              </a:xfrm>
-              <a:prstGeom prst="rect">
-                <a:avLst/>
-              </a:prstGeom>
-              <a:noFill/>
-              <a:ln w="3175">
-                <a:noFill/>
-              </a:ln>
-            </p:spPr>
-            <p:txBody>
-              <a:bodyPr wrap="square" rtlCol="0">
-                <a:spAutoFit/>
-              </a:bodyPr>
-              <a:lstStyle/>
-              <a:p>
-                <a:pPr algn="ctr"/>
-                <a:r>
-                  <a:rPr lang="en-US" sz="1000" dirty="0">
-                    <a:solidFill>
-                      <a:srgbClr val="333333"/>
-                    </a:solidFill>
-                    <a:latin typeface="Calibri Light" panose="020F0302020204030204" pitchFamily="34" charset="0"/>
-                    <a:cs typeface="Calibri Light" panose="020F0302020204030204" pitchFamily="34" charset="0"/>
-                  </a:rPr>
-                  <a:t>Count the number of reports in each grid-box</a:t>
-                </a:r>
-              </a:p>
-            </p:txBody>
-          </p:sp>
-          <p:cxnSp>
-            <p:nvCxnSpPr>
-              <p:cNvPr id="75" name="Straight Arrow Connector 74">
-                <a:extLst>
-                  <a:ext uri="{FF2B5EF4-FFF2-40B4-BE49-F238E27FC236}">
-                    <a16:creationId xmlns:a16="http://schemas.microsoft.com/office/drawing/2014/main" id="{5667AB7E-0F25-A398-F0F1-25358AC8EBA7}"/>
-                  </a:ext>
-                </a:extLst>
-              </p:cNvPr>
-              <p:cNvCxnSpPr>
-                <a:cxnSpLocks/>
-              </p:cNvCxnSpPr>
-              <p:nvPr/>
-            </p:nvCxnSpPr>
-            <p:spPr>
-              <a:xfrm>
-                <a:off x="1933624" y="3966604"/>
-                <a:ext cx="0" cy="190337"/>
-              </a:xfrm>
-              <a:prstGeom prst="straightConnector1">
-                <a:avLst/>
-              </a:prstGeom>
-              <a:ln w="3175">
-                <a:solidFill>
-                  <a:schemeClr val="tx1">
-                    <a:lumMod val="65000"/>
-                    <a:lumOff val="35000"/>
-                  </a:schemeClr>
-                </a:solidFill>
-                <a:tailEnd type="triangle"/>
-              </a:ln>
-            </p:spPr>
-            <p:style>
-              <a:lnRef idx="2">
-                <a:schemeClr val="accent1"/>
-              </a:lnRef>
-              <a:fillRef idx="0">
-                <a:schemeClr val="accent1"/>
-              </a:fillRef>
-              <a:effectRef idx="1">
-                <a:schemeClr val="accent1"/>
-              </a:effectRef>
-              <a:fontRef idx="minor">
-                <a:schemeClr val="tx1"/>
-              </a:fontRef>
-            </p:style>
-          </p:cxnSp>
-          <p:pic>
-            <p:nvPicPr>
-              <p:cNvPr id="76" name="Picture 75">
-                <a:extLst>
-                  <a:ext uri="{FF2B5EF4-FFF2-40B4-BE49-F238E27FC236}">
-                    <a16:creationId xmlns:a16="http://schemas.microsoft.com/office/drawing/2014/main" id="{65235F20-5D5A-B0D1-9DF3-817E37973F25}"/>
-                  </a:ext>
-                </a:extLst>
-              </p:cNvPr>
-              <p:cNvPicPr>
-                <a:picLocks noChangeAspect="1"/>
-              </p:cNvPicPr>
-              <p:nvPr/>
-            </p:nvPicPr>
-            <p:blipFill>
-              <a:blip r:embed="rId4"/>
-              <a:srcRect l="2708" t="1599" r="14583"/>
-              <a:stretch>
-                <a:fillRect/>
-              </a:stretch>
-            </p:blipFill>
-            <p:spPr>
-              <a:xfrm>
-                <a:off x="1612008" y="4557051"/>
-                <a:ext cx="710969" cy="707886"/>
-              </a:xfrm>
-              <a:prstGeom prst="rect">
-                <a:avLst/>
-              </a:prstGeom>
-            </p:spPr>
-          </p:pic>
-        </p:grpSp>
-        <p:sp>
-          <p:nvSpPr>
-            <p:cNvPr id="68" name="Rectangle 67">
-              <a:extLst>
-                <a:ext uri="{FF2B5EF4-FFF2-40B4-BE49-F238E27FC236}">
-                  <a16:creationId xmlns:a16="http://schemas.microsoft.com/office/drawing/2014/main" id="{A7B0EF48-DED5-5148-BBEE-84B972A0A0F8}"/>
-                </a:ext>
-              </a:extLst>
-            </p:cNvPr>
-            <p:cNvSpPr/>
-            <p:nvPr/>
-          </p:nvSpPr>
-          <p:spPr>
-            <a:xfrm>
-              <a:off x="1851043" y="501686"/>
-              <a:ext cx="1759319" cy="4857709"/>
-            </a:xfrm>
-            <a:prstGeom prst="rect">
-              <a:avLst/>
-            </a:prstGeom>
-            <a:noFill/>
-            <a:ln w="3175">
-              <a:solidFill>
-                <a:schemeClr val="tx1">
-                  <a:lumMod val="65000"/>
-                  <a:lumOff val="35000"/>
-                </a:schemeClr>
-              </a:solidFill>
-            </a:ln>
-          </p:spPr>
-          <p:style>
-            <a:lnRef idx="2">
-              <a:schemeClr val="accent1">
-                <a:shade val="15000"/>
+          <a:prstGeom prst="rect">
+            <a:avLst/>
+          </a:prstGeom>
+          <a:noFill/>
+          <a:ln w="3175">
+            <a:solidFill>
+              <a:schemeClr val="tx1">
+                <a:lumMod val="65000"/>
+                <a:lumOff val="35000"/>
               </a:schemeClr>
-            </a:lnRef>
-            <a:fillRef idx="1">
-              <a:schemeClr val="accent1"/>
-            </a:fillRef>
-            <a:effectRef idx="0">
-              <a:schemeClr val="accent1"/>
-            </a:effectRef>
-            <a:fontRef idx="minor">
-              <a:schemeClr val="lt1"/>
-            </a:fontRef>
-          </p:style>
-          <p:txBody>
-            <a:bodyPr rtlCol="0" anchor="ctr"/>
-            <a:lstStyle/>
-            <a:p>
-              <a:pPr algn="ctr"/>
-              <a:endParaRPr lang="it-IT" dirty="0"/>
-            </a:p>
-          </p:txBody>
-        </p:sp>
-      </p:grpSp>
-      <p:grpSp>
-        <p:nvGrpSpPr>
-          <p:cNvPr id="82" name="Group 81">
-            <a:extLst>
-              <a:ext uri="{FF2B5EF4-FFF2-40B4-BE49-F238E27FC236}">
-                <a16:creationId xmlns:a16="http://schemas.microsoft.com/office/drawing/2014/main" id="{872DB2F7-6FAA-CB54-86FF-3765AD701207}"/>
-              </a:ext>
-            </a:extLst>
-          </p:cNvPr>
-          <p:cNvGrpSpPr/>
-          <p:nvPr/>
-        </p:nvGrpSpPr>
-        <p:grpSpPr>
-          <a:xfrm>
-            <a:off x="3533569" y="1797877"/>
-            <a:ext cx="1759319" cy="2169866"/>
-            <a:chOff x="4480239" y="1858124"/>
-            <a:chExt cx="1759319" cy="2169866"/>
-          </a:xfrm>
-        </p:grpSpPr>
-        <p:grpSp>
-          <p:nvGrpSpPr>
-            <p:cNvPr id="83" name="Group 82">
-              <a:extLst>
-                <a:ext uri="{FF2B5EF4-FFF2-40B4-BE49-F238E27FC236}">
-                  <a16:creationId xmlns:a16="http://schemas.microsoft.com/office/drawing/2014/main" id="{9A6D2E77-AAF9-D3A8-D746-CFFEEFE17520}"/>
-                </a:ext>
-              </a:extLst>
-            </p:cNvPr>
-            <p:cNvGrpSpPr/>
-            <p:nvPr/>
-          </p:nvGrpSpPr>
-          <p:grpSpPr>
-            <a:xfrm>
-              <a:off x="4480239" y="1877377"/>
-              <a:ext cx="1759319" cy="2066018"/>
-              <a:chOff x="3210239" y="814748"/>
-              <a:chExt cx="1759319" cy="2066018"/>
-            </a:xfrm>
-          </p:grpSpPr>
-          <p:pic>
-            <p:nvPicPr>
-              <p:cNvPr id="85" name="Picture 84">
-                <a:extLst>
-                  <a:ext uri="{FF2B5EF4-FFF2-40B4-BE49-F238E27FC236}">
-                    <a16:creationId xmlns:a16="http://schemas.microsoft.com/office/drawing/2014/main" id="{7C4F1250-5AF8-C7F6-9A78-271C75A6DE07}"/>
-                  </a:ext>
-                </a:extLst>
-              </p:cNvPr>
-              <p:cNvPicPr>
-                <a:picLocks noChangeAspect="1"/>
-              </p:cNvPicPr>
-              <p:nvPr/>
-            </p:nvPicPr>
-            <p:blipFill>
-              <a:blip r:embed="rId5"/>
-              <a:stretch>
-                <a:fillRect/>
-              </a:stretch>
-            </p:blipFill>
-            <p:spPr>
-              <a:xfrm>
-                <a:off x="3739863" y="2172879"/>
-                <a:ext cx="645463" cy="707887"/>
-              </a:xfrm>
-              <a:prstGeom prst="rect">
-                <a:avLst/>
-              </a:prstGeom>
-            </p:spPr>
-          </p:pic>
-          <p:sp>
-            <p:nvSpPr>
-              <p:cNvPr id="86" name="TextBox 85">
-                <a:extLst>
-                  <a:ext uri="{FF2B5EF4-FFF2-40B4-BE49-F238E27FC236}">
-                    <a16:creationId xmlns:a16="http://schemas.microsoft.com/office/drawing/2014/main" id="{83B97A3E-BF25-2C9C-A028-9CBE8D5603ED}"/>
-                  </a:ext>
-                </a:extLst>
-              </p:cNvPr>
-              <p:cNvSpPr txBox="1"/>
-              <p:nvPr/>
-            </p:nvSpPr>
-            <p:spPr>
-              <a:xfrm>
-                <a:off x="3336313" y="814748"/>
-                <a:ext cx="1507170" cy="553998"/>
-              </a:xfrm>
-              <a:prstGeom prst="rect">
-                <a:avLst/>
-              </a:prstGeom>
-              <a:noFill/>
-              <a:ln w="3175">
-                <a:noFill/>
-              </a:ln>
-            </p:spPr>
-            <p:txBody>
-              <a:bodyPr wrap="square" rtlCol="0">
-                <a:spAutoFit/>
-              </a:bodyPr>
-              <a:lstStyle/>
-              <a:p>
-                <a:pPr algn="ctr"/>
-                <a:r>
-                  <a:rPr lang="en-US" sz="1000" dirty="0">
-                    <a:solidFill>
-                      <a:srgbClr val="333333"/>
-                    </a:solidFill>
-                    <a:latin typeface="Calibri Light" panose="020F0302020204030204" pitchFamily="34" charset="0"/>
-                    <a:cs typeface="Calibri Light" panose="020F0302020204030204" pitchFamily="34" charset="0"/>
-                  </a:rPr>
-                  <a:t>(c)</a:t>
-                </a:r>
-                <a:br>
-                  <a:rPr lang="en-US" sz="1000" dirty="0">
-                    <a:solidFill>
-                      <a:srgbClr val="333333"/>
-                    </a:solidFill>
-                    <a:latin typeface="Calibri Light" panose="020F0302020204030204" pitchFamily="34" charset="0"/>
-                    <a:cs typeface="Calibri Light" panose="020F0302020204030204" pitchFamily="34" charset="0"/>
-                  </a:rPr>
-                </a:br>
-                <a:r>
-                  <a:rPr lang="en-US" sz="1000" dirty="0">
-                    <a:solidFill>
-                      <a:srgbClr val="333333"/>
-                    </a:solidFill>
-                    <a:latin typeface="Calibri Light" panose="020F0302020204030204" pitchFamily="34" charset="0"/>
-                    <a:cs typeface="Calibri Light" panose="020F0302020204030204" pitchFamily="34" charset="0"/>
-                  </a:rPr>
-                  <a:t>OBSERVATIONAL GRIDDED FIELD</a:t>
-                </a:r>
-              </a:p>
-            </p:txBody>
-          </p:sp>
-          <p:sp>
-            <p:nvSpPr>
-              <p:cNvPr id="87" name="TextBox 86">
-                <a:extLst>
-                  <a:ext uri="{FF2B5EF4-FFF2-40B4-BE49-F238E27FC236}">
-                    <a16:creationId xmlns:a16="http://schemas.microsoft.com/office/drawing/2014/main" id="{495484E7-DE8A-893A-111A-9BAC0431DE2B}"/>
-                  </a:ext>
-                </a:extLst>
-              </p:cNvPr>
-              <p:cNvSpPr txBox="1"/>
-              <p:nvPr/>
-            </p:nvSpPr>
-            <p:spPr>
-              <a:xfrm>
-                <a:off x="3210239" y="1546039"/>
-                <a:ext cx="1759319" cy="553998"/>
-              </a:xfrm>
-              <a:prstGeom prst="rect">
-                <a:avLst/>
-              </a:prstGeom>
-              <a:noFill/>
-              <a:ln w="3175">
-                <a:noFill/>
-              </a:ln>
-            </p:spPr>
-            <p:txBody>
-              <a:bodyPr wrap="square" rtlCol="0">
-                <a:spAutoFit/>
-              </a:bodyPr>
-              <a:lstStyle/>
-              <a:p>
-                <a:pPr algn="ctr"/>
-                <a:r>
-                  <a:rPr lang="en-US" sz="1000" dirty="0">
-                    <a:solidFill>
-                      <a:srgbClr val="333333"/>
-                    </a:solidFill>
-                    <a:latin typeface="Calibri Light" panose="020F0302020204030204" pitchFamily="34" charset="0"/>
-                    <a:cs typeface="Calibri Light" panose="020F0302020204030204" pitchFamily="34" charset="0"/>
-                  </a:rPr>
-                  <a:t>Assign 1 to grid-boxes with at least 1 report; o, otherwise</a:t>
-                </a:r>
-              </a:p>
-              <a:p>
-                <a:pPr algn="ctr"/>
-                <a:r>
-                  <a:rPr lang="en-US" sz="1000" dirty="0">
-                    <a:solidFill>
-                      <a:srgbClr val="333333"/>
-                    </a:solidFill>
-                    <a:latin typeface="Calibri Light" panose="020F0302020204030204" pitchFamily="34" charset="0"/>
-                    <a:cs typeface="Calibri Light" panose="020F0302020204030204" pitchFamily="34" charset="0"/>
-                  </a:rPr>
-                  <a:t>(binary field)</a:t>
-                </a:r>
-              </a:p>
-            </p:txBody>
-          </p:sp>
-        </p:grpSp>
-        <p:sp>
-          <p:nvSpPr>
-            <p:cNvPr id="84" name="Rectangle 83">
-              <a:extLst>
-                <a:ext uri="{FF2B5EF4-FFF2-40B4-BE49-F238E27FC236}">
-                  <a16:creationId xmlns:a16="http://schemas.microsoft.com/office/drawing/2014/main" id="{2317A568-3F89-13AE-99AB-5423B34939E8}"/>
-                </a:ext>
-              </a:extLst>
-            </p:cNvPr>
-            <p:cNvSpPr/>
-            <p:nvPr/>
-          </p:nvSpPr>
-          <p:spPr>
-            <a:xfrm>
-              <a:off x="4510474" y="1858124"/>
-              <a:ext cx="1704708" cy="2169866"/>
-            </a:xfrm>
-            <a:prstGeom prst="rect">
-              <a:avLst/>
-            </a:prstGeom>
-            <a:noFill/>
-            <a:ln w="3175">
-              <a:solidFill>
-                <a:schemeClr val="tx1">
-                  <a:lumMod val="65000"/>
-                  <a:lumOff val="35000"/>
-                </a:schemeClr>
-              </a:solidFill>
-            </a:ln>
-          </p:spPr>
-          <p:style>
-            <a:lnRef idx="2">
-              <a:schemeClr val="accent1">
-                <a:shade val="15000"/>
-              </a:schemeClr>
-            </a:lnRef>
-            <a:fillRef idx="1">
-              <a:schemeClr val="accent1"/>
-            </a:fillRef>
-            <a:effectRef idx="0">
-              <a:schemeClr val="accent1"/>
-            </a:effectRef>
-            <a:fontRef idx="minor">
-              <a:schemeClr val="lt1"/>
-            </a:fontRef>
-          </p:style>
-          <p:txBody>
-            <a:bodyPr rtlCol="0" anchor="ctr"/>
-            <a:lstStyle/>
-            <a:p>
-              <a:pPr algn="ctr"/>
-              <a:endParaRPr lang="it-IT" dirty="0"/>
-            </a:p>
-          </p:txBody>
-        </p:sp>
-      </p:grpSp>
+            </a:solidFill>
+          </a:ln>
+        </p:spPr>
+        <p:style>
+          <a:lnRef idx="2">
+            <a:schemeClr val="accent1">
+              <a:shade val="15000"/>
+            </a:schemeClr>
+          </a:lnRef>
+          <a:fillRef idx="1">
+            <a:schemeClr val="accent1"/>
+          </a:fillRef>
+          <a:effectRef idx="0">
+            <a:schemeClr val="accent1"/>
+          </a:effectRef>
+          <a:fontRef idx="minor">
+            <a:schemeClr val="lt1"/>
+          </a:fontRef>
+        </p:style>
+        <p:txBody>
+          <a:bodyPr rtlCol="0" anchor="ctr"/>
+          <a:lstStyle/>
+          <a:p>
+            <a:pPr algn="ctr"/>
+            <a:endParaRPr lang="it-IT" dirty="0"/>
+          </a:p>
+        </p:txBody>
+      </p:sp>
       <p:cxnSp>
         <p:nvCxnSpPr>
           <p:cNvPr id="88" name="Straight Arrow Connector 87">
@@ -4905,7 +4723,7 @@
           <p:nvPr/>
         </p:nvPicPr>
         <p:blipFill>
-          <a:blip r:embed="rId6"/>
+          <a:blip r:embed="rId4"/>
           <a:stretch>
             <a:fillRect/>
           </a:stretch>
@@ -4928,6 +4746,502 @@
           </a:ln>
         </p:spPr>
       </p:pic>
+      <p:pic>
+        <p:nvPicPr>
+          <p:cNvPr id="6" name="Graphic 5">
+            <a:extLst>
+              <a:ext uri="{FF2B5EF4-FFF2-40B4-BE49-F238E27FC236}">
+                <a16:creationId xmlns:a16="http://schemas.microsoft.com/office/drawing/2014/main" id="{44D84F46-CC9F-5F9C-D658-0E7843806A54}"/>
+              </a:ext>
+            </a:extLst>
+          </p:cNvPr>
+          <p:cNvPicPr>
+            <a:picLocks noChangeAspect="1"/>
+          </p:cNvPicPr>
+          <p:nvPr/>
+        </p:nvPicPr>
+        <p:blipFill>
+          <a:blip r:embed="rId5">
+            <a:extLst>
+              <a:ext uri="{96DAC541-7B7A-43D3-8B79-37D633B846F1}">
+                <asvg:svgBlip xmlns:asvg="http://schemas.microsoft.com/office/drawing/2016/SVG/main" r:embed="rId6"/>
+              </a:ext>
+            </a:extLst>
+          </a:blip>
+          <a:stretch>
+            <a:fillRect/>
+          </a:stretch>
+        </p:blipFill>
+        <p:spPr>
+          <a:xfrm>
+            <a:off x="1459624" y="3141604"/>
+            <a:ext cx="709470" cy="709470"/>
+          </a:xfrm>
+          <a:prstGeom prst="rect">
+            <a:avLst/>
+          </a:prstGeom>
+        </p:spPr>
+      </p:pic>
+      <p:pic>
+        <p:nvPicPr>
+          <p:cNvPr id="8" name="Graphic 7">
+            <a:extLst>
+              <a:ext uri="{FF2B5EF4-FFF2-40B4-BE49-F238E27FC236}">
+                <a16:creationId xmlns:a16="http://schemas.microsoft.com/office/drawing/2014/main" id="{CB885E2D-163B-453A-70BF-966A290C733E}"/>
+              </a:ext>
+            </a:extLst>
+          </p:cNvPr>
+          <p:cNvPicPr>
+            <a:picLocks noChangeAspect="1"/>
+          </p:cNvPicPr>
+          <p:nvPr/>
+        </p:nvPicPr>
+        <p:blipFill>
+          <a:blip r:embed="rId7">
+            <a:extLst>
+              <a:ext uri="{96DAC541-7B7A-43D3-8B79-37D633B846F1}">
+                <asvg:svgBlip xmlns:asvg="http://schemas.microsoft.com/office/drawing/2016/SVG/main" r:embed="rId8"/>
+              </a:ext>
+            </a:extLst>
+          </a:blip>
+          <a:stretch>
+            <a:fillRect/>
+          </a:stretch>
+        </p:blipFill>
+        <p:spPr>
+          <a:xfrm>
+            <a:off x="1884410" y="4469381"/>
+            <a:ext cx="787400" cy="787400"/>
+          </a:xfrm>
+          <a:prstGeom prst="rect">
+            <a:avLst/>
+          </a:prstGeom>
+        </p:spPr>
+      </p:pic>
+      <p:grpSp>
+        <p:nvGrpSpPr>
+          <p:cNvPr id="13" name="Group 12">
+            <a:extLst>
+              <a:ext uri="{FF2B5EF4-FFF2-40B4-BE49-F238E27FC236}">
+                <a16:creationId xmlns:a16="http://schemas.microsoft.com/office/drawing/2014/main" id="{D4B79B93-0C6E-8157-D9C9-1EBD91EBA715}"/>
+              </a:ext>
+            </a:extLst>
+          </p:cNvPr>
+          <p:cNvGrpSpPr/>
+          <p:nvPr/>
+        </p:nvGrpSpPr>
+        <p:grpSpPr>
+          <a:xfrm>
+            <a:off x="3533569" y="1797877"/>
+            <a:ext cx="1759319" cy="2169866"/>
+            <a:chOff x="3533569" y="1797877"/>
+            <a:chExt cx="1759319" cy="2169866"/>
+          </a:xfrm>
+        </p:grpSpPr>
+        <p:pic>
+          <p:nvPicPr>
+            <p:cNvPr id="85" name="Picture 84">
+              <a:extLst>
+                <a:ext uri="{FF2B5EF4-FFF2-40B4-BE49-F238E27FC236}">
+                  <a16:creationId xmlns:a16="http://schemas.microsoft.com/office/drawing/2014/main" id="{7C4F1250-5AF8-C7F6-9A78-271C75A6DE07}"/>
+                </a:ext>
+              </a:extLst>
+            </p:cNvPr>
+            <p:cNvPicPr>
+              <a:picLocks noChangeAspect="1"/>
+            </p:cNvPicPr>
+            <p:nvPr/>
+          </p:nvPicPr>
+          <p:blipFill>
+            <a:blip r:embed="rId9"/>
+            <a:stretch>
+              <a:fillRect/>
+            </a:stretch>
+          </p:blipFill>
+          <p:spPr>
+            <a:xfrm>
+              <a:off x="4090497" y="3175261"/>
+              <a:ext cx="645463" cy="707887"/>
+            </a:xfrm>
+            <a:prstGeom prst="rect">
+              <a:avLst/>
+            </a:prstGeom>
+          </p:spPr>
+        </p:pic>
+        <p:sp>
+          <p:nvSpPr>
+            <p:cNvPr id="86" name="TextBox 85">
+              <a:extLst>
+                <a:ext uri="{FF2B5EF4-FFF2-40B4-BE49-F238E27FC236}">
+                  <a16:creationId xmlns:a16="http://schemas.microsoft.com/office/drawing/2014/main" id="{83B97A3E-BF25-2C9C-A028-9CBE8D5603ED}"/>
+                </a:ext>
+              </a:extLst>
+            </p:cNvPr>
+            <p:cNvSpPr txBox="1"/>
+            <p:nvPr/>
+          </p:nvSpPr>
+          <p:spPr>
+            <a:xfrm>
+              <a:off x="3659643" y="1817130"/>
+              <a:ext cx="1507170" cy="553998"/>
+            </a:xfrm>
+            <a:prstGeom prst="rect">
+              <a:avLst/>
+            </a:prstGeom>
+            <a:noFill/>
+            <a:ln w="3175">
+              <a:noFill/>
+            </a:ln>
+          </p:spPr>
+          <p:txBody>
+            <a:bodyPr wrap="square" rtlCol="0">
+              <a:spAutoFit/>
+            </a:bodyPr>
+            <a:lstStyle/>
+            <a:p>
+              <a:pPr algn="ctr"/>
+              <a:r>
+                <a:rPr lang="en-US" sz="1000" dirty="0">
+                  <a:solidFill>
+                    <a:srgbClr val="333333"/>
+                  </a:solidFill>
+                  <a:latin typeface="Calibri Light" panose="020F0302020204030204" pitchFamily="34" charset="0"/>
+                  <a:cs typeface="Calibri Light" panose="020F0302020204030204" pitchFamily="34" charset="0"/>
+                </a:rPr>
+                <a:t>(c)</a:t>
+              </a:r>
+              <a:br>
+                <a:rPr lang="en-US" sz="1000" dirty="0">
+                  <a:solidFill>
+                    <a:srgbClr val="333333"/>
+                  </a:solidFill>
+                  <a:latin typeface="Calibri Light" panose="020F0302020204030204" pitchFamily="34" charset="0"/>
+                  <a:cs typeface="Calibri Light" panose="020F0302020204030204" pitchFamily="34" charset="0"/>
+                </a:rPr>
+              </a:br>
+              <a:r>
+                <a:rPr lang="en-US" sz="1000" dirty="0">
+                  <a:solidFill>
+                    <a:srgbClr val="333333"/>
+                  </a:solidFill>
+                  <a:latin typeface="Calibri Light" panose="020F0302020204030204" pitchFamily="34" charset="0"/>
+                  <a:cs typeface="Calibri Light" panose="020F0302020204030204" pitchFamily="34" charset="0"/>
+                </a:rPr>
+                <a:t>OBSERVATIONAL GRIDDED FIELD</a:t>
+              </a:r>
+            </a:p>
+          </p:txBody>
+        </p:sp>
+        <p:sp>
+          <p:nvSpPr>
+            <p:cNvPr id="87" name="TextBox 86">
+              <a:extLst>
+                <a:ext uri="{FF2B5EF4-FFF2-40B4-BE49-F238E27FC236}">
+                  <a16:creationId xmlns:a16="http://schemas.microsoft.com/office/drawing/2014/main" id="{495484E7-DE8A-893A-111A-9BAC0431DE2B}"/>
+                </a:ext>
+              </a:extLst>
+            </p:cNvPr>
+            <p:cNvSpPr txBox="1"/>
+            <p:nvPr/>
+          </p:nvSpPr>
+          <p:spPr>
+            <a:xfrm>
+              <a:off x="3533569" y="2548421"/>
+              <a:ext cx="1759319" cy="608628"/>
+            </a:xfrm>
+            <a:prstGeom prst="rect">
+              <a:avLst/>
+            </a:prstGeom>
+            <a:noFill/>
+            <a:ln w="3175">
+              <a:noFill/>
+            </a:ln>
+          </p:spPr>
+          <p:txBody>
+            <a:bodyPr wrap="square" rtlCol="0">
+              <a:spAutoFit/>
+            </a:bodyPr>
+            <a:lstStyle/>
+            <a:p>
+              <a:pPr algn="ctr">
+                <a:lnSpc>
+                  <a:spcPct val="114000"/>
+                </a:lnSpc>
+              </a:pPr>
+              <a:r>
+                <a:rPr lang="en-US" sz="1000" dirty="0">
+                  <a:solidFill>
+                    <a:srgbClr val="333333"/>
+                  </a:solidFill>
+                  <a:latin typeface="Calibri Light" panose="020F0302020204030204" pitchFamily="34" charset="0"/>
+                  <a:cs typeface="Calibri Light" panose="020F0302020204030204" pitchFamily="34" charset="0"/>
+                </a:rPr>
+                <a:t>Assign         to grid-boxes with </a:t>
+              </a:r>
+            </a:p>
+            <a:p>
+              <a:pPr algn="ctr">
+                <a:lnSpc>
+                  <a:spcPct val="114000"/>
+                </a:lnSpc>
+              </a:pPr>
+              <a:r>
+                <a:rPr lang="en-US" sz="1000" dirty="0">
+                  <a:solidFill>
+                    <a:srgbClr val="333333"/>
+                  </a:solidFill>
+                  <a:latin typeface="Calibri Light" panose="020F0302020204030204" pitchFamily="34" charset="0"/>
+                  <a:cs typeface="Calibri Light" panose="020F0302020204030204" pitchFamily="34" charset="0"/>
+                </a:rPr>
+                <a:t>at least one report;    otherwise (binary field)</a:t>
+              </a:r>
+            </a:p>
+          </p:txBody>
+        </p:sp>
+        <p:sp>
+          <p:nvSpPr>
+            <p:cNvPr id="84" name="Rectangle 83">
+              <a:extLst>
+                <a:ext uri="{FF2B5EF4-FFF2-40B4-BE49-F238E27FC236}">
+                  <a16:creationId xmlns:a16="http://schemas.microsoft.com/office/drawing/2014/main" id="{2317A568-3F89-13AE-99AB-5423B34939E8}"/>
+                </a:ext>
+              </a:extLst>
+            </p:cNvPr>
+            <p:cNvSpPr/>
+            <p:nvPr/>
+          </p:nvSpPr>
+          <p:spPr>
+            <a:xfrm>
+              <a:off x="3560874" y="1797877"/>
+              <a:ext cx="1704708" cy="2169866"/>
+            </a:xfrm>
+            <a:prstGeom prst="rect">
+              <a:avLst/>
+            </a:prstGeom>
+            <a:noFill/>
+            <a:ln w="3175">
+              <a:solidFill>
+                <a:schemeClr val="tx1">
+                  <a:lumMod val="65000"/>
+                  <a:lumOff val="35000"/>
+                </a:schemeClr>
+              </a:solidFill>
+            </a:ln>
+          </p:spPr>
+          <p:style>
+            <a:lnRef idx="2">
+              <a:schemeClr val="accent1">
+                <a:shade val="15000"/>
+              </a:schemeClr>
+            </a:lnRef>
+            <a:fillRef idx="1">
+              <a:schemeClr val="accent1"/>
+            </a:fillRef>
+            <a:effectRef idx="0">
+              <a:schemeClr val="accent1"/>
+            </a:effectRef>
+            <a:fontRef idx="minor">
+              <a:schemeClr val="lt1"/>
+            </a:fontRef>
+          </p:style>
+          <p:txBody>
+            <a:bodyPr rtlCol="0" anchor="ctr"/>
+            <a:lstStyle/>
+            <a:p>
+              <a:pPr algn="ctr"/>
+              <a:endParaRPr lang="it-IT" dirty="0"/>
+            </a:p>
+          </p:txBody>
+        </p:sp>
+        <p:sp>
+          <p:nvSpPr>
+            <p:cNvPr id="9" name="TextBox 8">
+              <a:extLst>
+                <a:ext uri="{FF2B5EF4-FFF2-40B4-BE49-F238E27FC236}">
+                  <a16:creationId xmlns:a16="http://schemas.microsoft.com/office/drawing/2014/main" id="{288CBE8A-D728-A863-6E7E-B69BDCEC8C94}"/>
+                </a:ext>
+              </a:extLst>
+            </p:cNvPr>
+            <p:cNvSpPr txBox="1"/>
+            <p:nvPr/>
+          </p:nvSpPr>
+          <p:spPr>
+            <a:xfrm>
+              <a:off x="4015723" y="2591169"/>
+              <a:ext cx="180000" cy="180000"/>
+            </a:xfrm>
+            <a:prstGeom prst="rect">
+              <a:avLst/>
+            </a:prstGeom>
+            <a:solidFill>
+              <a:srgbClr val="ADDFE0"/>
+            </a:solidFill>
+          </p:spPr>
+          <p:txBody>
+            <a:bodyPr wrap="none" rtlCol="0">
+              <a:spAutoFit/>
+            </a:bodyPr>
+            <a:lstStyle/>
+            <a:p>
+              <a:endParaRPr lang="it-IT" sz="1200" b="1" dirty="0">
+                <a:solidFill>
+                  <a:srgbClr val="60AEBB"/>
+                </a:solidFill>
+                <a:latin typeface="Calibri" panose="020F0502020204030204" pitchFamily="34" charset="0"/>
+                <a:ea typeface="Calibri" panose="020F0502020204030204" pitchFamily="34" charset="0"/>
+                <a:cs typeface="Calibri" panose="020F0502020204030204" pitchFamily="34" charset="0"/>
+              </a:endParaRPr>
+            </a:p>
+          </p:txBody>
+        </p:sp>
+        <p:sp>
+          <p:nvSpPr>
+            <p:cNvPr id="10" name="TextBox 9">
+              <a:extLst>
+                <a:ext uri="{FF2B5EF4-FFF2-40B4-BE49-F238E27FC236}">
+                  <a16:creationId xmlns:a16="http://schemas.microsoft.com/office/drawing/2014/main" id="{AC68D853-B4DB-1139-485A-2696D64CD685}"/>
+                </a:ext>
+              </a:extLst>
+            </p:cNvPr>
+            <p:cNvSpPr txBox="1"/>
+            <p:nvPr/>
+          </p:nvSpPr>
+          <p:spPr>
+            <a:xfrm>
+              <a:off x="3974116" y="2534433"/>
+              <a:ext cx="263214" cy="276999"/>
+            </a:xfrm>
+            <a:prstGeom prst="rect">
+              <a:avLst/>
+            </a:prstGeom>
+            <a:noFill/>
+          </p:spPr>
+          <p:txBody>
+            <a:bodyPr wrap="none" rtlCol="0">
+              <a:spAutoFit/>
+            </a:bodyPr>
+            <a:lstStyle/>
+            <a:p>
+              <a:r>
+                <a:rPr lang="en-GB" sz="1200" b="1" dirty="0">
+                  <a:solidFill>
+                    <a:srgbClr val="60AEBB"/>
+                  </a:solidFill>
+                  <a:latin typeface="Calibri" panose="020F0502020204030204" pitchFamily="34" charset="0"/>
+                  <a:ea typeface="Calibri" panose="020F0502020204030204" pitchFamily="34" charset="0"/>
+                  <a:cs typeface="Calibri" panose="020F0502020204030204" pitchFamily="34" charset="0"/>
+                </a:rPr>
+                <a:t>1</a:t>
+              </a:r>
+              <a:endParaRPr lang="it-IT" sz="1200" b="1" dirty="0">
+                <a:solidFill>
+                  <a:srgbClr val="60AEBB"/>
+                </a:solidFill>
+                <a:latin typeface="Calibri" panose="020F0502020204030204" pitchFamily="34" charset="0"/>
+                <a:ea typeface="Calibri" panose="020F0502020204030204" pitchFamily="34" charset="0"/>
+                <a:cs typeface="Calibri" panose="020F0502020204030204" pitchFamily="34" charset="0"/>
+              </a:endParaRPr>
+            </a:p>
+          </p:txBody>
+        </p:sp>
+        <p:sp>
+          <p:nvSpPr>
+            <p:cNvPr id="11" name="TextBox 10">
+              <a:extLst>
+                <a:ext uri="{FF2B5EF4-FFF2-40B4-BE49-F238E27FC236}">
+                  <a16:creationId xmlns:a16="http://schemas.microsoft.com/office/drawing/2014/main" id="{A6E281B1-96B6-9580-6F86-551F986094BC}"/>
+                </a:ext>
+              </a:extLst>
+            </p:cNvPr>
+            <p:cNvSpPr txBox="1"/>
+            <p:nvPr/>
+          </p:nvSpPr>
+          <p:spPr>
+            <a:xfrm>
+              <a:off x="4938440" y="2771159"/>
+              <a:ext cx="180000" cy="180000"/>
+            </a:xfrm>
+            <a:prstGeom prst="rect">
+              <a:avLst/>
+            </a:prstGeom>
+            <a:solidFill>
+              <a:srgbClr val="D4B193"/>
+            </a:solidFill>
+          </p:spPr>
+          <p:txBody>
+            <a:bodyPr wrap="none" rtlCol="0">
+              <a:spAutoFit/>
+            </a:bodyPr>
+            <a:lstStyle/>
+            <a:p>
+              <a:endParaRPr lang="it-IT" sz="1200" b="1" dirty="0">
+                <a:solidFill>
+                  <a:srgbClr val="60AEBB"/>
+                </a:solidFill>
+                <a:latin typeface="Calibri" panose="020F0502020204030204" pitchFamily="34" charset="0"/>
+                <a:ea typeface="Calibri" panose="020F0502020204030204" pitchFamily="34" charset="0"/>
+                <a:cs typeface="Calibri" panose="020F0502020204030204" pitchFamily="34" charset="0"/>
+              </a:endParaRPr>
+            </a:p>
+          </p:txBody>
+        </p:sp>
+        <p:sp>
+          <p:nvSpPr>
+            <p:cNvPr id="12" name="TextBox 11">
+              <a:extLst>
+                <a:ext uri="{FF2B5EF4-FFF2-40B4-BE49-F238E27FC236}">
+                  <a16:creationId xmlns:a16="http://schemas.microsoft.com/office/drawing/2014/main" id="{180766EE-FB1E-3E60-CC59-657F79EDDB42}"/>
+                </a:ext>
+              </a:extLst>
+            </p:cNvPr>
+            <p:cNvSpPr txBox="1"/>
+            <p:nvPr/>
+          </p:nvSpPr>
+          <p:spPr>
+            <a:xfrm>
+              <a:off x="4896833" y="2714423"/>
+              <a:ext cx="263214" cy="276999"/>
+            </a:xfrm>
+            <a:prstGeom prst="rect">
+              <a:avLst/>
+            </a:prstGeom>
+            <a:noFill/>
+          </p:spPr>
+          <p:txBody>
+            <a:bodyPr wrap="none" rtlCol="0">
+              <a:spAutoFit/>
+            </a:bodyPr>
+            <a:lstStyle/>
+            <a:p>
+              <a:r>
+                <a:rPr lang="en-GB" sz="1200" b="1" dirty="0">
+                  <a:solidFill>
+                    <a:schemeClr val="tx1">
+                      <a:lumMod val="85000"/>
+                      <a:lumOff val="15000"/>
+                    </a:schemeClr>
+                  </a:solidFill>
+                  <a:latin typeface="Calibri" panose="020F0502020204030204" pitchFamily="34" charset="0"/>
+                  <a:ea typeface="Calibri" panose="020F0502020204030204" pitchFamily="34" charset="0"/>
+                  <a:cs typeface="Calibri" panose="020F0502020204030204" pitchFamily="34" charset="0"/>
+                </a:rPr>
+                <a:t>0</a:t>
+              </a:r>
+              <a:endParaRPr lang="it-IT" sz="1200" b="1" dirty="0">
+                <a:solidFill>
+                  <a:schemeClr val="tx1">
+                    <a:lumMod val="85000"/>
+                    <a:lumOff val="15000"/>
+                  </a:schemeClr>
+                </a:solidFill>
+                <a:latin typeface="Calibri" panose="020F0502020204030204" pitchFamily="34" charset="0"/>
+                <a:ea typeface="Calibri" panose="020F0502020204030204" pitchFamily="34" charset="0"/>
+                <a:cs typeface="Calibri" panose="020F0502020204030204" pitchFamily="34" charset="0"/>
+              </a:endParaRPr>
+            </a:p>
+          </p:txBody>
+        </p:sp>
+      </p:grpSp>
     </p:spTree>
     <p:extLst>
       <p:ext uri="{BB962C8B-B14F-4D97-AF65-F5344CB8AC3E}">
